--- a/skills/presentation-template-library/skills/artifact-template-forest-strategy/assets/reference.pptx
+++ b/skills/presentation-template-library/skills/artifact-template-forest-strategy/assets/reference.pptx
@@ -1916,7 +1916,7 @@
           <p:nvPr/>
         </p:nvPicPr>
         <p:blipFill>
-          <a:blip xmlns:r="http://schemas.openxmlformats.org/officeDocument/2006/relationships" xmlns:a="http://schemas.openxmlformats.org/drawingml/2006/main" r:embed="rIdOfficeKitImaged71bfa074cda59bb_1"/>
+          <a:blip xmlns:r="http://schemas.openxmlformats.org/officeDocument/2006/relationships" xmlns:a="http://schemas.openxmlformats.org/drawingml/2006/main" r:embed="rIdOfficeKitImageff1582c14d42a1a7_1"/>
           <a:srcRect xmlns:a="http://schemas.openxmlformats.org/drawingml/2006/main" l="0" t="47258" r="0" b="47258"/>
           <a:stretch xmlns:a="http://schemas.openxmlformats.org/drawingml/2006/main">
             <a:fillRect/>
@@ -3477,7 +3477,7 @@
           <p:nvPr/>
         </p:nvPicPr>
         <p:blipFill>
-          <a:blip xmlns:r="http://schemas.openxmlformats.org/officeDocument/2006/relationships" xmlns:a="http://schemas.openxmlformats.org/drawingml/2006/main" r:embed="rIdOfficeKitImage7650495d0c3b8602_1"/>
+          <a:blip xmlns:r="http://schemas.openxmlformats.org/officeDocument/2006/relationships" xmlns:a="http://schemas.openxmlformats.org/drawingml/2006/main" r:embed="rIdOfficeKitImaged71bfa074cda59bb_1"/>
           <a:srcRect xmlns:a="http://schemas.openxmlformats.org/drawingml/2006/main" l="0" t="47258" r="0" b="47258"/>
           <a:stretch xmlns:a="http://schemas.openxmlformats.org/drawingml/2006/main">
             <a:fillRect/>
@@ -3690,7 +3690,7 @@
         </p:xfrm>
         <a:graphic xmlns:a="http://schemas.openxmlformats.org/drawingml/2006/main">
           <a:graphicData uri="http://schemas.openxmlformats.org/drawingml/2006/chart">
-            <c:chart xmlns:r="http://schemas.openxmlformats.org/officeDocument/2006/relationships" xmlns:c="http://schemas.openxmlformats.org/drawingml/2006/chart" r:id="R9fd01c20e3fa4c0a"/>
+            <c:chart xmlns:r="http://schemas.openxmlformats.org/officeDocument/2006/relationships" xmlns:c="http://schemas.openxmlformats.org/drawingml/2006/chart" r:id="Rb8f4b9a3b69f4224"/>
           </a:graphicData>
         </a:graphic>
       </p:graphicFrame>
@@ -3708,7 +3708,7 @@
         </p:xfrm>
         <a:graphic xmlns:a="http://schemas.openxmlformats.org/drawingml/2006/main">
           <a:graphicData uri="http://schemas.openxmlformats.org/drawingml/2006/chart">
-            <c:chart xmlns:r="http://schemas.openxmlformats.org/officeDocument/2006/relationships" xmlns:c="http://schemas.openxmlformats.org/drawingml/2006/chart" r:id="R04f17cf6d6ad493e"/>
+            <c:chart xmlns:r="http://schemas.openxmlformats.org/officeDocument/2006/relationships" xmlns:c="http://schemas.openxmlformats.org/drawingml/2006/chart" r:id="R01a38fd78e694b98"/>
           </a:graphicData>
         </a:graphic>
       </p:graphicFrame>
@@ -4485,7 +4485,7 @@
           <p:nvPr/>
         </p:nvPicPr>
         <p:blipFill>
-          <a:blip xmlns:r="http://schemas.openxmlformats.org/officeDocument/2006/relationships" xmlns:a="http://schemas.openxmlformats.org/drawingml/2006/main" r:embed="rIdOfficeKitImagec7b73f8fac405495_1"/>
+          <a:blip xmlns:r="http://schemas.openxmlformats.org/officeDocument/2006/relationships" xmlns:a="http://schemas.openxmlformats.org/drawingml/2006/main" r:embed="rIdOfficeKitImagee4bd683f73b7a543_1"/>
           <a:srcRect xmlns:a="http://schemas.openxmlformats.org/drawingml/2006/main" l="0" t="47256" r="0" b="47256"/>
           <a:stretch xmlns:a="http://schemas.openxmlformats.org/drawingml/2006/main">
             <a:fillRect/>
@@ -6078,7 +6078,7 @@
           <p:nvPr/>
         </p:nvPicPr>
         <p:blipFill>
-          <a:blip xmlns:r="http://schemas.openxmlformats.org/officeDocument/2006/relationships" xmlns:a="http://schemas.openxmlformats.org/drawingml/2006/main" r:embed="rIdOfficeKitImaged71bfa074cda59bb_1"/>
+          <a:blip xmlns:r="http://schemas.openxmlformats.org/officeDocument/2006/relationships" xmlns:a="http://schemas.openxmlformats.org/drawingml/2006/main" r:embed="rIdOfficeKitImage7650495d0c3b8602_1"/>
           <a:srcRect xmlns:a="http://schemas.openxmlformats.org/drawingml/2006/main" l="0" t="47258" r="0" b="47258"/>
           <a:stretch xmlns:a="http://schemas.openxmlformats.org/drawingml/2006/main">
             <a:fillRect/>
@@ -7750,8 +7750,8 @@
           <p:nvPr/>
         </p:nvPicPr>
         <p:blipFill>
-          <a:blip xmlns:r="http://schemas.openxmlformats.org/officeDocument/2006/relationships" xmlns:a="http://schemas.openxmlformats.org/drawingml/2006/main" r:embed="rIdOfficeKitImage7650495d0c3b8602_1"/>
-          <a:srcRect xmlns:a="http://schemas.openxmlformats.org/drawingml/2006/main" l="0" t="47258" r="0" b="47258"/>
+          <a:blip xmlns:r="http://schemas.openxmlformats.org/officeDocument/2006/relationships" xmlns:a="http://schemas.openxmlformats.org/drawingml/2006/main" r:embed="rIdOfficeKitImagec7b73f8fac405495_1"/>
+          <a:srcRect xmlns:a="http://schemas.openxmlformats.org/drawingml/2006/main" l="0" t="47256" r="0" b="47256"/>
           <a:stretch xmlns:a="http://schemas.openxmlformats.org/drawingml/2006/main">
             <a:fillRect/>
           </a:stretch>

--- a/skills/presentation-template-library/skills/artifact-template-forest-strategy/assets/reference.pptx
+++ b/skills/presentation-template-library/skills/artifact-template-forest-strategy/assets/reference.pptx
@@ -508,8 +508,8 @@
           <p:nvPr/>
         </p:nvPicPr>
         <p:blipFill>
-          <a:blip xmlns:r="http://schemas.openxmlformats.org/officeDocument/2006/relationships" xmlns:a="http://schemas.openxmlformats.org/drawingml/2006/main" r:embed="rIdOfficeKitImagec7b73f8fac405495_1"/>
-          <a:srcRect xmlns:a="http://schemas.openxmlformats.org/drawingml/2006/main" l="0" t="34171" r="0" b="34171"/>
+          <a:blip xmlns:r="http://schemas.openxmlformats.org/officeDocument/2006/relationships" xmlns:a="http://schemas.openxmlformats.org/drawingml/2006/main" r:embed="rIdOfficeKitImage7650495d0c3b8602_1"/>
+          <a:srcRect xmlns:a="http://schemas.openxmlformats.org/drawingml/2006/main" l="0" t="34180" r="0" b="34180"/>
           <a:stretch xmlns:a="http://schemas.openxmlformats.org/drawingml/2006/main">
             <a:fillRect/>
           </a:stretch>
@@ -1916,8 +1916,8 @@
           <p:nvPr/>
         </p:nvPicPr>
         <p:blipFill>
-          <a:blip xmlns:r="http://schemas.openxmlformats.org/officeDocument/2006/relationships" xmlns:a="http://schemas.openxmlformats.org/drawingml/2006/main" r:embed="rIdOfficeKitImageff1582c14d42a1a7_1"/>
-          <a:srcRect xmlns:a="http://schemas.openxmlformats.org/drawingml/2006/main" l="0" t="47258" r="0" b="47258"/>
+          <a:blip xmlns:r="http://schemas.openxmlformats.org/officeDocument/2006/relationships" xmlns:a="http://schemas.openxmlformats.org/drawingml/2006/main" r:embed="rIdOfficeKitImagee4bd683f73b7a543_1"/>
+          <a:srcRect xmlns:a="http://schemas.openxmlformats.org/drawingml/2006/main" l="0" t="47256" r="0" b="47256"/>
           <a:stretch xmlns:a="http://schemas.openxmlformats.org/drawingml/2006/main">
             <a:fillRect/>
           </a:stretch>
@@ -3477,8 +3477,8 @@
           <p:nvPr/>
         </p:nvPicPr>
         <p:blipFill>
-          <a:blip xmlns:r="http://schemas.openxmlformats.org/officeDocument/2006/relationships" xmlns:a="http://schemas.openxmlformats.org/drawingml/2006/main" r:embed="rIdOfficeKitImaged71bfa074cda59bb_1"/>
-          <a:srcRect xmlns:a="http://schemas.openxmlformats.org/drawingml/2006/main" l="0" t="47258" r="0" b="47258"/>
+          <a:blip xmlns:r="http://schemas.openxmlformats.org/officeDocument/2006/relationships" xmlns:a="http://schemas.openxmlformats.org/drawingml/2006/main" r:embed="rIdOfficeKitImagec7b73f8fac405495_1"/>
+          <a:srcRect xmlns:a="http://schemas.openxmlformats.org/drawingml/2006/main" l="0" t="47256" r="0" b="47256"/>
           <a:stretch xmlns:a="http://schemas.openxmlformats.org/drawingml/2006/main">
             <a:fillRect/>
           </a:stretch>
@@ -3690,7 +3690,7 @@
         </p:xfrm>
         <a:graphic xmlns:a="http://schemas.openxmlformats.org/drawingml/2006/main">
           <a:graphicData uri="http://schemas.openxmlformats.org/drawingml/2006/chart">
-            <c:chart xmlns:r="http://schemas.openxmlformats.org/officeDocument/2006/relationships" xmlns:c="http://schemas.openxmlformats.org/drawingml/2006/chart" r:id="Rb8f4b9a3b69f4224"/>
+            <c:chart xmlns:r="http://schemas.openxmlformats.org/officeDocument/2006/relationships" xmlns:c="http://schemas.openxmlformats.org/drawingml/2006/chart" r:id="R34ca992d71e6496f"/>
           </a:graphicData>
         </a:graphic>
       </p:graphicFrame>
@@ -3708,7 +3708,7 @@
         </p:xfrm>
         <a:graphic xmlns:a="http://schemas.openxmlformats.org/drawingml/2006/main">
           <a:graphicData uri="http://schemas.openxmlformats.org/drawingml/2006/chart">
-            <c:chart xmlns:r="http://schemas.openxmlformats.org/officeDocument/2006/relationships" xmlns:c="http://schemas.openxmlformats.org/drawingml/2006/chart" r:id="R01a38fd78e694b98"/>
+            <c:chart xmlns:r="http://schemas.openxmlformats.org/officeDocument/2006/relationships" xmlns:c="http://schemas.openxmlformats.org/drawingml/2006/chart" r:id="Rb603b19377fb44a1"/>
           </a:graphicData>
         </a:graphic>
       </p:graphicFrame>
@@ -4485,7 +4485,7 @@
           <p:nvPr/>
         </p:nvPicPr>
         <p:blipFill>
-          <a:blip xmlns:r="http://schemas.openxmlformats.org/officeDocument/2006/relationships" xmlns:a="http://schemas.openxmlformats.org/drawingml/2006/main" r:embed="rIdOfficeKitImagee4bd683f73b7a543_1"/>
+          <a:blip xmlns:r="http://schemas.openxmlformats.org/officeDocument/2006/relationships" xmlns:a="http://schemas.openxmlformats.org/drawingml/2006/main" r:embed="rIdOfficeKitImage2930549abca3ae00_1"/>
           <a:srcRect xmlns:a="http://schemas.openxmlformats.org/drawingml/2006/main" l="0" t="47256" r="0" b="47256"/>
           <a:stretch xmlns:a="http://schemas.openxmlformats.org/drawingml/2006/main">
             <a:fillRect/>
@@ -6078,7 +6078,7 @@
           <p:nvPr/>
         </p:nvPicPr>
         <p:blipFill>
-          <a:blip xmlns:r="http://schemas.openxmlformats.org/officeDocument/2006/relationships" xmlns:a="http://schemas.openxmlformats.org/drawingml/2006/main" r:embed="rIdOfficeKitImage7650495d0c3b8602_1"/>
+          <a:blip xmlns:r="http://schemas.openxmlformats.org/officeDocument/2006/relationships" xmlns:a="http://schemas.openxmlformats.org/drawingml/2006/main" r:embed="rIdOfficeKitImageff1582c14d42a1a7_1"/>
           <a:srcRect xmlns:a="http://schemas.openxmlformats.org/drawingml/2006/main" l="0" t="47258" r="0" b="47258"/>
           <a:stretch xmlns:a="http://schemas.openxmlformats.org/drawingml/2006/main">
             <a:fillRect/>
@@ -7750,8 +7750,8 @@
           <p:nvPr/>
         </p:nvPicPr>
         <p:blipFill>
-          <a:blip xmlns:r="http://schemas.openxmlformats.org/officeDocument/2006/relationships" xmlns:a="http://schemas.openxmlformats.org/drawingml/2006/main" r:embed="rIdOfficeKitImagec7b73f8fac405495_1"/>
-          <a:srcRect xmlns:a="http://schemas.openxmlformats.org/drawingml/2006/main" l="0" t="47256" r="0" b="47256"/>
+          <a:blip xmlns:r="http://schemas.openxmlformats.org/officeDocument/2006/relationships" xmlns:a="http://schemas.openxmlformats.org/drawingml/2006/main" r:embed="rIdOfficeKitImaged71bfa074cda59bb_1"/>
+          <a:srcRect xmlns:a="http://schemas.openxmlformats.org/drawingml/2006/main" l="0" t="47258" r="0" b="47258"/>
           <a:stretch xmlns:a="http://schemas.openxmlformats.org/drawingml/2006/main">
             <a:fillRect/>
           </a:stretch>

--- a/skills/presentation-template-library/skills/artifact-template-forest-strategy/assets/reference.pptx
+++ b/skills/presentation-template-library/skills/artifact-template-forest-strategy/assets/reference.pptx
@@ -481,6 +481,16 @@
 <file path=ppt/slides/slide1.xml><?xml version="1.0" encoding="utf-8"?>
 <p:sld xmlns:p="http://schemas.openxmlformats.org/presentationml/2006/main">
   <p:cSld name="Opening claim">
+    <p:bg>
+      <p:bgPr>
+        <a:blipFill xmlns:a="http://schemas.openxmlformats.org/drawingml/2006/main">
+          <a:blip xmlns:r="http://schemas.openxmlformats.org/officeDocument/2006/relationships" r:embed="rIdOfficeKitImage7650495d0c3b8602_1"/>
+          <a:stretch>
+            <a:fillRect/>
+          </a:stretch>
+        </a:blipFill>
+      </p:bgPr>
+    </p:bg>
     <p:spTree>
       <p:nvGrpSpPr>
         <p:cNvPr id="1" name=""/>
@@ -495,38 +505,9 @@
           <a:chExt cx="0" cy="0"/>
         </a:xfrm>
       </p:grpSpPr>
-      <p:pic>
-        <p:nvPicPr>
-          <p:cNvPr id="2" name="artifact-template-forest-strategy-cover-field">
-            <a:extLst xmlns:a="http://schemas.openxmlformats.org/drawingml/2006/main">
-              <a:ext uri="{C183D7F6-B498-43B3-948B-1728B52AA6E4}">
-                <adec:decorative xmlns:adec="http://schemas.microsoft.com/office/drawing/2017/decorative" val="1"/>
-              </a:ext>
-            </a:extLst>
-          </p:cNvPr>
-          <p:cNvPicPr/>
-          <p:nvPr/>
-        </p:nvPicPr>
-        <p:blipFill>
-          <a:blip xmlns:r="http://schemas.openxmlformats.org/officeDocument/2006/relationships" xmlns:a="http://schemas.openxmlformats.org/drawingml/2006/main" r:embed="rIdOfficeKitImage7650495d0c3b8602_1"/>
-          <a:srcRect xmlns:a="http://schemas.openxmlformats.org/drawingml/2006/main" l="0" t="34180" r="0" b="34180"/>
-          <a:stretch xmlns:a="http://schemas.openxmlformats.org/drawingml/2006/main">
-            <a:fillRect/>
-          </a:stretch>
-        </p:blipFill>
-        <p:spPr>
-          <a:xfrm xmlns:a="http://schemas.openxmlformats.org/drawingml/2006/main">
-            <a:off x="0" y="0"/>
-            <a:ext cx="15240000" cy="8572500"/>
-          </a:xfrm>
-          <a:prstGeom xmlns:a="http://schemas.openxmlformats.org/drawingml/2006/main" prst="rect">
-            <a:avLst/>
-          </a:prstGeom>
-        </p:spPr>
-      </p:pic>
-      <p:sp>
-        <p:nvSpPr>
-          <p:cNvPr id="3" name="cover-paper-scrim"/>
+      <p:sp>
+        <p:nvSpPr>
+          <p:cNvPr id="2" name="cover-paper-scrim"/>
           <p:cNvSpPr/>
           <p:nvPr/>
         </p:nvSpPr>
@@ -564,7 +545,7 @@
       </p:sp>
       <p:sp>
         <p:nvSpPr>
-          <p:cNvPr id="4" name="fixed-rail"/>
+          <p:cNvPr id="3" name="fixed-rail"/>
           <p:cNvSpPr/>
           <p:nvPr/>
         </p:nvSpPr>
@@ -600,7 +581,7 @@
       </p:sp>
       <p:sp>
         <p:nvSpPr>
-          <p:cNvPr id="5" name="fixed-nav-0"/>
+          <p:cNvPr id="4" name="fixed-nav-0"/>
           <p:cNvSpPr/>
           <p:nvPr/>
         </p:nvSpPr>
@@ -636,7 +617,7 @@
       </p:sp>
       <p:sp>
         <p:nvSpPr>
-          <p:cNvPr id="6" name="fixed-nav-label-0"/>
+          <p:cNvPr id="5" name="fixed-nav-label-0"/>
           <p:cNvSpPr txBox="1"/>
           <p:nvPr/>
         </p:nvSpPr>
@@ -674,7 +655,7 @@
       </p:sp>
       <p:sp>
         <p:nvSpPr>
-          <p:cNvPr id="7" name="fixed-nav-1"/>
+          <p:cNvPr id="6" name="fixed-nav-1"/>
           <p:cNvSpPr/>
           <p:nvPr/>
         </p:nvSpPr>
@@ -710,7 +691,7 @@
       </p:sp>
       <p:sp>
         <p:nvSpPr>
-          <p:cNvPr id="8" name="fixed-nav-label-1"/>
+          <p:cNvPr id="7" name="fixed-nav-label-1"/>
           <p:cNvSpPr txBox="1"/>
           <p:nvPr/>
         </p:nvSpPr>
@@ -748,7 +729,7 @@
       </p:sp>
       <p:sp>
         <p:nvSpPr>
-          <p:cNvPr id="9" name="fixed-nav-2"/>
+          <p:cNvPr id="8" name="fixed-nav-2"/>
           <p:cNvSpPr/>
           <p:nvPr/>
         </p:nvSpPr>
@@ -784,7 +765,7 @@
       </p:sp>
       <p:sp>
         <p:nvSpPr>
-          <p:cNvPr id="10" name="fixed-nav-label-2"/>
+          <p:cNvPr id="9" name="fixed-nav-label-2"/>
           <p:cNvSpPr txBox="1"/>
           <p:nvPr/>
         </p:nvSpPr>
@@ -822,7 +803,7 @@
       </p:sp>
       <p:sp>
         <p:nvSpPr>
-          <p:cNvPr id="11" name="fixed-nav-3"/>
+          <p:cNvPr id="10" name="fixed-nav-3"/>
           <p:cNvSpPr/>
           <p:nvPr/>
         </p:nvSpPr>
@@ -858,7 +839,7 @@
       </p:sp>
       <p:sp>
         <p:nvSpPr>
-          <p:cNvPr id="12" name="fixed-nav-label-3"/>
+          <p:cNvPr id="11" name="fixed-nav-label-3"/>
           <p:cNvSpPr txBox="1"/>
           <p:nvPr/>
         </p:nvSpPr>
@@ -896,7 +877,7 @@
       </p:sp>
       <p:sp>
         <p:nvSpPr>
-          <p:cNvPr id="13" name="fixed-nav-4"/>
+          <p:cNvPr id="12" name="fixed-nav-4"/>
           <p:cNvSpPr/>
           <p:nvPr/>
         </p:nvSpPr>
@@ -932,7 +913,7 @@
       </p:sp>
       <p:sp>
         <p:nvSpPr>
-          <p:cNvPr id="14" name="fixed-nav-label-4"/>
+          <p:cNvPr id="13" name="fixed-nav-label-4"/>
           <p:cNvSpPr txBox="1"/>
           <p:nvPr/>
         </p:nvSpPr>
@@ -970,7 +951,7 @@
       </p:sp>
       <p:sp>
         <p:nvSpPr>
-          <p:cNvPr id="15" name="top-rule"/>
+          <p:cNvPr id="14" name="top-rule"/>
           <p:cNvSpPr/>
           <p:nvPr/>
         </p:nvSpPr>
@@ -1004,7 +985,7 @@
       </p:sp>
       <p:sp>
         <p:nvSpPr>
-          <p:cNvPr id="16" name="eyebrow"/>
+          <p:cNvPr id="15" name="eyebrow"/>
           <p:cNvSpPr txBox="1"/>
           <p:nvPr/>
         </p:nvSpPr>
@@ -1041,7 +1022,7 @@
       </p:sp>
       <p:sp>
         <p:nvSpPr>
-          <p:cNvPr id="17" name="cover-title"/>
+          <p:cNvPr id="16" name="cover-title"/>
           <p:cNvSpPr txBox="1"/>
           <p:nvPr/>
         </p:nvSpPr>
@@ -1078,7 +1059,7 @@
       </p:sp>
       <p:sp>
         <p:nvSpPr>
-          <p:cNvPr id="18" name="cover-subtitle"/>
+          <p:cNvPr id="17" name="cover-subtitle"/>
           <p:cNvSpPr txBox="1"/>
           <p:nvPr/>
         </p:nvSpPr>
@@ -1115,7 +1096,7 @@
       </p:sp>
       <p:sp>
         <p:nvSpPr>
-          <p:cNvPr id="19" name="cover-rule"/>
+          <p:cNvPr id="18" name="cover-rule"/>
           <p:cNvSpPr/>
           <p:nvPr/>
         </p:nvSpPr>
@@ -1149,7 +1130,7 @@
       </p:sp>
       <p:sp>
         <p:nvSpPr>
-          <p:cNvPr id="20" name="cover-basis"/>
+          <p:cNvPr id="19" name="cover-basis"/>
           <p:cNvSpPr txBox="1"/>
           <p:nvPr/>
         </p:nvSpPr>
@@ -1186,7 +1167,7 @@
       </p:sp>
       <p:sp>
         <p:nvSpPr>
-          <p:cNvPr id="21" name="cover-thesis"/>
+          <p:cNvPr id="20" name="cover-thesis"/>
           <p:cNvSpPr txBox="1"/>
           <p:nvPr/>
         </p:nvSpPr>
@@ -1223,7 +1204,7 @@
       </p:sp>
       <p:sp>
         <p:nvSpPr>
-          <p:cNvPr id="22" name="cover-source"/>
+          <p:cNvPr id="21" name="cover-source"/>
           <p:cNvSpPr txBox="1"/>
           <p:nvPr/>
         </p:nvSpPr>
@@ -1260,7 +1241,7 @@
       </p:sp>
       <p:sp>
         <p:nvSpPr>
-          <p:cNvPr id="23" name="page-number"/>
+          <p:cNvPr id="22" name="page-number"/>
           <p:cNvSpPr txBox="1"/>
           <p:nvPr/>
         </p:nvSpPr>
@@ -1298,7 +1279,7 @@
       </p:sp>
       <p:sp>
         <p:nvSpPr>
-          <p:cNvPr id="24" name="anchor-field"/>
+          <p:cNvPr id="23" name="anchor-field"/>
           <p:cNvSpPr/>
           <p:nvPr/>
         </p:nvSpPr>
@@ -1334,7 +1315,7 @@
       </p:sp>
       <p:sp>
         <p:nvSpPr>
-          <p:cNvPr id="25" name="anchor-line"/>
+          <p:cNvPr id="24" name="anchor-line"/>
           <p:cNvSpPr/>
           <p:nvPr/>
         </p:nvSpPr>
@@ -1368,7 +1349,7 @@
       </p:sp>
       <p:sp>
         <p:nvSpPr>
-          <p:cNvPr id="26" name="anchor-line-two"/>
+          <p:cNvPr id="25" name="anchor-line-two"/>
           <p:cNvSpPr/>
           <p:nvPr/>
         </p:nvSpPr>
@@ -1402,7 +1383,7 @@
       </p:sp>
       <p:sp>
         <p:nvSpPr>
-          <p:cNvPr id="27" name="anchor-dot"/>
+          <p:cNvPr id="26" name="anchor-dot"/>
           <p:cNvSpPr/>
           <p:nvPr/>
         </p:nvSpPr>
@@ -3690,7 +3671,7 @@
         </p:xfrm>
         <a:graphic xmlns:a="http://schemas.openxmlformats.org/drawingml/2006/main">
           <a:graphicData uri="http://schemas.openxmlformats.org/drawingml/2006/chart">
-            <c:chart xmlns:r="http://schemas.openxmlformats.org/officeDocument/2006/relationships" xmlns:c="http://schemas.openxmlformats.org/drawingml/2006/chart" r:id="R34ca992d71e6496f"/>
+            <c:chart xmlns:r="http://schemas.openxmlformats.org/officeDocument/2006/relationships" xmlns:c="http://schemas.openxmlformats.org/drawingml/2006/chart" r:id="Rd089bffeb3dc471f"/>
           </a:graphicData>
         </a:graphic>
       </p:graphicFrame>
@@ -3708,7 +3689,7 @@
         </p:xfrm>
         <a:graphic xmlns:a="http://schemas.openxmlformats.org/drawingml/2006/main">
           <a:graphicData uri="http://schemas.openxmlformats.org/drawingml/2006/chart">
-            <c:chart xmlns:r="http://schemas.openxmlformats.org/officeDocument/2006/relationships" xmlns:c="http://schemas.openxmlformats.org/drawingml/2006/chart" r:id="Rb603b19377fb44a1"/>
+            <c:chart xmlns:r="http://schemas.openxmlformats.org/officeDocument/2006/relationships" xmlns:c="http://schemas.openxmlformats.org/drawingml/2006/chart" r:id="Rb1ef941ab3a54ac0"/>
           </a:graphicData>
         </a:graphic>
       </p:graphicFrame>

--- a/skills/presentation-template-library/skills/artifact-template-forest-strategy/assets/reference.pptx
+++ b/skills/presentation-template-library/skills/artifact-template-forest-strategy/assets/reference.pptx
@@ -484,7 +484,7 @@
     <p:bg>
       <p:bgPr>
         <a:blipFill xmlns:a="http://schemas.openxmlformats.org/drawingml/2006/main">
-          <a:blip xmlns:r="http://schemas.openxmlformats.org/officeDocument/2006/relationships" r:embed="rIdOfficeKitImage7650495d0c3b8602_1"/>
+          <a:blip xmlns:r="http://schemas.openxmlformats.org/officeDocument/2006/relationships" r:embed="rIdOfficeKitImagee4bd683f73b7a543_1"/>
           <a:stretch>
             <a:fillRect/>
           </a:stretch>
@@ -1897,8 +1897,8 @@
           <p:nvPr/>
         </p:nvPicPr>
         <p:blipFill>
-          <a:blip xmlns:r="http://schemas.openxmlformats.org/officeDocument/2006/relationships" xmlns:a="http://schemas.openxmlformats.org/drawingml/2006/main" r:embed="rIdOfficeKitImagee4bd683f73b7a543_1"/>
-          <a:srcRect xmlns:a="http://schemas.openxmlformats.org/drawingml/2006/main" l="0" t="47256" r="0" b="47256"/>
+          <a:blip xmlns:r="http://schemas.openxmlformats.org/officeDocument/2006/relationships" xmlns:a="http://schemas.openxmlformats.org/drawingml/2006/main" r:embed="rIdOfficeKitImage9df32179333a9f35_1"/>
+          <a:srcRect xmlns:a="http://schemas.openxmlformats.org/drawingml/2006/main" l="0" t="47258" r="0" b="47258"/>
           <a:stretch xmlns:a="http://schemas.openxmlformats.org/drawingml/2006/main">
             <a:fillRect/>
           </a:stretch>
@@ -3458,8 +3458,8 @@
           <p:nvPr/>
         </p:nvPicPr>
         <p:blipFill>
-          <a:blip xmlns:r="http://schemas.openxmlformats.org/officeDocument/2006/relationships" xmlns:a="http://schemas.openxmlformats.org/drawingml/2006/main" r:embed="rIdOfficeKitImagec7b73f8fac405495_1"/>
-          <a:srcRect xmlns:a="http://schemas.openxmlformats.org/drawingml/2006/main" l="0" t="47256" r="0" b="47256"/>
+          <a:blip xmlns:r="http://schemas.openxmlformats.org/officeDocument/2006/relationships" xmlns:a="http://schemas.openxmlformats.org/drawingml/2006/main" r:embed="rIdOfficeKitImage283e3eeb8530a9d2_1"/>
+          <a:srcRect xmlns:a="http://schemas.openxmlformats.org/drawingml/2006/main" l="0" t="47258" r="0" b="47258"/>
           <a:stretch xmlns:a="http://schemas.openxmlformats.org/drawingml/2006/main">
             <a:fillRect/>
           </a:stretch>
@@ -3671,7 +3671,7 @@
         </p:xfrm>
         <a:graphic xmlns:a="http://schemas.openxmlformats.org/drawingml/2006/main">
           <a:graphicData uri="http://schemas.openxmlformats.org/drawingml/2006/chart">
-            <c:chart xmlns:r="http://schemas.openxmlformats.org/officeDocument/2006/relationships" xmlns:c="http://schemas.openxmlformats.org/drawingml/2006/chart" r:id="Rd089bffeb3dc471f"/>
+            <c:chart xmlns:r="http://schemas.openxmlformats.org/officeDocument/2006/relationships" xmlns:c="http://schemas.openxmlformats.org/drawingml/2006/chart" r:id="Rb5e762488e454ded"/>
           </a:graphicData>
         </a:graphic>
       </p:graphicFrame>
@@ -3689,7 +3689,7 @@
         </p:xfrm>
         <a:graphic xmlns:a="http://schemas.openxmlformats.org/drawingml/2006/main">
           <a:graphicData uri="http://schemas.openxmlformats.org/drawingml/2006/chart">
-            <c:chart xmlns:r="http://schemas.openxmlformats.org/officeDocument/2006/relationships" xmlns:c="http://schemas.openxmlformats.org/drawingml/2006/chart" r:id="Rb1ef941ab3a54ac0"/>
+            <c:chart xmlns:r="http://schemas.openxmlformats.org/officeDocument/2006/relationships" xmlns:c="http://schemas.openxmlformats.org/drawingml/2006/chart" r:id="Rc8bddcbcc79b4dd1"/>
           </a:graphicData>
         </a:graphic>
       </p:graphicFrame>
@@ -4466,7 +4466,7 @@
           <p:nvPr/>
         </p:nvPicPr>
         <p:blipFill>
-          <a:blip xmlns:r="http://schemas.openxmlformats.org/officeDocument/2006/relationships" xmlns:a="http://schemas.openxmlformats.org/drawingml/2006/main" r:embed="rIdOfficeKitImage2930549abca3ae00_1"/>
+          <a:blip xmlns:r="http://schemas.openxmlformats.org/officeDocument/2006/relationships" xmlns:a="http://schemas.openxmlformats.org/drawingml/2006/main" r:embed="rIdOfficeKitImageb7d7d39d00e5a7e4_1"/>
           <a:srcRect xmlns:a="http://schemas.openxmlformats.org/drawingml/2006/main" l="0" t="47256" r="0" b="47256"/>
           <a:stretch xmlns:a="http://schemas.openxmlformats.org/drawingml/2006/main">
             <a:fillRect/>
@@ -5590,6 +5590,16 @@
 <file path=ppt/slides/slide5.xml><?xml version="1.0" encoding="utf-8"?>
 <p:sld xmlns:p="http://schemas.openxmlformats.org/presentationml/2006/main">
   <p:cSld name="Visual carrier">
+    <p:bg>
+      <p:bgPr>
+        <a:blipFill xmlns:a="http://schemas.openxmlformats.org/drawingml/2006/main">
+          <a:blip xmlns:r="http://schemas.openxmlformats.org/officeDocument/2006/relationships" r:embed="rIdOfficeKitImage083106afebc7d419_1"/>
+          <a:stretch>
+            <a:fillRect/>
+          </a:stretch>
+        </a:blipFill>
+      </p:bgPr>
+    </p:bg>
     <p:spTree>
       <p:nvGrpSpPr>
         <p:cNvPr id="1" name=""/>
@@ -6012,117 +6022,126 @@
       </p:sp>
       <p:sp>
         <p:nvSpPr>
-          <p:cNvPr id="13" name="background"/>
+          <p:cNvPr id="13" name="section-reading-plane"/>
           <p:cNvSpPr/>
           <p:nvPr/>
         </p:nvSpPr>
         <p:spPr>
           <a:xfrm xmlns:a="http://schemas.openxmlformats.org/drawingml/2006/main">
             <a:off x="0" y="0"/>
-            <a:ext cx="15240000" cy="8572500"/>
+            <a:ext cx="7810500" cy="8572500"/>
           </a:xfrm>
           <a:prstGeom xmlns:a="http://schemas.openxmlformats.org/drawingml/2006/main" prst="rect">
             <a:avLst/>
           </a:prstGeom>
           <a:solidFill xmlns:a="http://schemas.openxmlformats.org/drawingml/2006/main">
-            <a:srgbClr val="F6F8F5"/>
-          </a:solidFill>
-          <a:ln xmlns:a="http://schemas.openxmlformats.org/drawingml/2006/main" w="0">
-            <a:solidFill>
-              <a:srgbClr val="F6F8F5"/>
-            </a:solidFill>
-            <a:prstDash val="solid"/>
-          </a:ln>
-        </p:spPr>
-        <p:txBody>
-          <a:bodyPr xmlns:a="http://schemas.openxmlformats.org/drawingml/2006/main" wrap="square" lIns="0" tIns="0" rIns="0" bIns="0" anchor="t"/>
-          <a:lstStyle xmlns:a="http://schemas.openxmlformats.org/drawingml/2006/main"/>
-          <a:p xmlns:a="http://schemas.openxmlformats.org/drawingml/2006/main">
-            <a:r>
-              <a:rPr lang="en-US"/>
-              <a:t/>
-            </a:r>
-            <a:endParaRPr lang="en-US"/>
-          </a:p>
-        </p:txBody>
-      </p:sp>
-      <p:pic>
-        <p:nvPicPr>
-          <p:cNvPr id="14" name="visual-photo-band">
-            <a:extLst xmlns:a="http://schemas.openxmlformats.org/drawingml/2006/main">
-              <a:ext uri="{C183D7F6-B498-43B3-948B-1728B52AA6E4}">
-                <adec:decorative xmlns:adec="http://schemas.microsoft.com/office/drawing/2017/decorative" val="1"/>
-              </a:ext>
-            </a:extLst>
-          </p:cNvPr>
-          <p:cNvPicPr/>
-          <p:nvPr/>
-        </p:nvPicPr>
-        <p:blipFill>
-          <a:blip xmlns:r="http://schemas.openxmlformats.org/officeDocument/2006/relationships" xmlns:a="http://schemas.openxmlformats.org/drawingml/2006/main" r:embed="rIdOfficeKitImageff1582c14d42a1a7_1"/>
-          <a:srcRect xmlns:a="http://schemas.openxmlformats.org/drawingml/2006/main" l="0" t="47258" r="0" b="47258"/>
-          <a:stretch xmlns:a="http://schemas.openxmlformats.org/drawingml/2006/main">
-            <a:fillRect/>
-          </a:stretch>
-        </p:blipFill>
-        <p:spPr>
-          <a:xfrm xmlns:a="http://schemas.openxmlformats.org/drawingml/2006/main">
-            <a:off x="0" y="0"/>
-            <a:ext cx="15240000" cy="1485900"/>
-          </a:xfrm>
-          <a:prstGeom xmlns:a="http://schemas.openxmlformats.org/drawingml/2006/main" prst="rect">
-            <a:avLst/>
-          </a:prstGeom>
-        </p:spPr>
-      </p:pic>
-      <p:sp>
-        <p:nvSpPr>
-          <p:cNvPr id="15" name="visual-photo-scrim"/>
-          <p:cNvSpPr/>
-          <p:nvPr/>
-        </p:nvSpPr>
-        <p:spPr>
-          <a:xfrm xmlns:a="http://schemas.openxmlformats.org/drawingml/2006/main">
-            <a:off x="0" y="0"/>
-            <a:ext cx="15240000" cy="1485900"/>
-          </a:xfrm>
-          <a:prstGeom xmlns:a="http://schemas.openxmlformats.org/drawingml/2006/main" prst="rect">
-            <a:avLst/>
-          </a:prstGeom>
-          <a:solidFill xmlns:a="http://schemas.openxmlformats.org/drawingml/2006/main">
-            <a:srgbClr val="183A2A">
-              <a:alpha val="62000"/>
+            <a:srgbClr val="F6F8F5">
+              <a:alpha val="94000"/>
             </a:srgbClr>
           </a:solidFill>
           <a:ln xmlns:a="http://schemas.openxmlformats.org/drawingml/2006/main" w="0">
             <a:solidFill>
-              <a:srgbClr val="183A2A"/>
-            </a:solidFill>
-            <a:prstDash val="solid"/>
-          </a:ln>
-        </p:spPr>
-        <p:txBody>
-          <a:bodyPr xmlns:a="http://schemas.openxmlformats.org/drawingml/2006/main" wrap="square" lIns="0" tIns="0" rIns="0" bIns="0" anchor="t"/>
-          <a:lstStyle xmlns:a="http://schemas.openxmlformats.org/drawingml/2006/main"/>
-          <a:p xmlns:a="http://schemas.openxmlformats.org/drawingml/2006/main">
-            <a:r>
-              <a:rPr lang="en-US"/>
-              <a:t/>
-            </a:r>
-            <a:endParaRPr lang="en-US"/>
-          </a:p>
-        </p:txBody>
-      </p:sp>
-      <p:sp>
-        <p:nvSpPr>
-          <p:cNvPr id="16" name="visual-photo-rule"/>
-          <p:cNvSpPr/>
-          <p:nvPr/>
-        </p:nvSpPr>
-        <p:spPr>
-          <a:xfrm xmlns:a="http://schemas.openxmlformats.org/drawingml/2006/main">
-            <a:off x="914400" y="1438275"/>
-            <a:ext cx="13411200" cy="0"/>
+              <a:srgbClr val="F6F8F5"/>
+            </a:solidFill>
+            <a:prstDash val="solid"/>
+          </a:ln>
+        </p:spPr>
+        <p:txBody>
+          <a:bodyPr xmlns:a="http://schemas.openxmlformats.org/drawingml/2006/main" wrap="square" lIns="0" tIns="0" rIns="0" bIns="0" anchor="t"/>
+          <a:lstStyle xmlns:a="http://schemas.openxmlformats.org/drawingml/2006/main"/>
+          <a:p xmlns:a="http://schemas.openxmlformats.org/drawingml/2006/main">
+            <a:r>
+              <a:rPr lang="en-US"/>
+              <a:t/>
+            </a:r>
+            <a:endParaRPr lang="en-US"/>
+          </a:p>
+        </p:txBody>
+      </p:sp>
+      <p:sp>
+        <p:nvSpPr>
+          <p:cNvPr id="14" name="section-eyebrow"/>
+          <p:cNvSpPr txBox="1"/>
+          <p:nvPr/>
+        </p:nvSpPr>
+        <p:spPr>
+          <a:xfrm xmlns:a="http://schemas.openxmlformats.org/drawingml/2006/main">
+            <a:off x="914400" y="914400"/>
+            <a:ext cx="6096000" cy="228600"/>
+          </a:xfrm>
+          <a:prstGeom xmlns:a="http://schemas.openxmlformats.org/drawingml/2006/main" prst="rect">
+            <a:avLst/>
+          </a:prstGeom>
+          <a:noFill xmlns:a="http://schemas.openxmlformats.org/drawingml/2006/main"/>
+          <a:ln xmlns:a="http://schemas.openxmlformats.org/drawingml/2006/main" w="0">
+            <a:noFill/>
+          </a:ln>
+        </p:spPr>
+        <p:txBody>
+          <a:bodyPr xmlns:a="http://schemas.openxmlformats.org/drawingml/2006/main" wrap="square" lIns="0" tIns="0" rIns="0" bIns="0" anchor="t"/>
+          <a:lstStyle xmlns:a="http://schemas.openxmlformats.org/drawingml/2006/main"/>
+          <a:p xmlns:a="http://schemas.openxmlformats.org/drawingml/2006/main">
+            <a:r>
+              <a:rPr lang="en-US" sz="1200" b="1">
+                <a:solidFill>
+                  <a:srgbClr val="2E8C5C"/>
+                </a:solidFill>
+                <a:latin typeface="Arial"/>
+                <a:ea typeface="Arial"/>
+              </a:rPr>
+              <a:t>FOREST STRATEGY · SECTION</a:t>
+            </a:r>
+            <a:endParaRPr lang="en-US"/>
+          </a:p>
+        </p:txBody>
+      </p:sp>
+      <p:sp>
+        <p:nvSpPr>
+          <p:cNvPr id="15" name="section-title"/>
+          <p:cNvSpPr txBox="1"/>
+          <p:nvPr/>
+        </p:nvSpPr>
+        <p:spPr>
+          <a:xfrm xmlns:a="http://schemas.openxmlformats.org/drawingml/2006/main">
+            <a:off x="914400" y="1657350"/>
+            <a:ext cx="5905500" cy="1162050"/>
+          </a:xfrm>
+          <a:prstGeom xmlns:a="http://schemas.openxmlformats.org/drawingml/2006/main" prst="rect">
+            <a:avLst/>
+          </a:prstGeom>
+          <a:noFill xmlns:a="http://schemas.openxmlformats.org/drawingml/2006/main"/>
+          <a:ln xmlns:a="http://schemas.openxmlformats.org/drawingml/2006/main" w="0">
+            <a:noFill/>
+          </a:ln>
+        </p:spPr>
+        <p:txBody>
+          <a:bodyPr xmlns:a="http://schemas.openxmlformats.org/drawingml/2006/main" wrap="square" lIns="0" tIns="0" rIns="0" bIns="0" anchor="t"/>
+          <a:lstStyle xmlns:a="http://schemas.openxmlformats.org/drawingml/2006/main"/>
+          <a:p xmlns:a="http://schemas.openxmlformats.org/drawingml/2006/main">
+            <a:r>
+              <a:rPr lang="en-US" sz="3450" b="1">
+                <a:solidFill>
+                  <a:srgbClr val="183A2A"/>
+                </a:solidFill>
+                <a:latin typeface="Arial"/>
+                <a:ea typeface="Arial"/>
+              </a:rPr>
+              <a:t>Make the choice legible</a:t>
+            </a:r>
+            <a:endParaRPr lang="en-US"/>
+          </a:p>
+        </p:txBody>
+      </p:sp>
+      <p:sp>
+        <p:nvSpPr>
+          <p:cNvPr id="16" name="section-rule"/>
+          <p:cNvSpPr/>
+          <p:nvPr/>
+        </p:nvSpPr>
+        <p:spPr>
+          <a:xfrm xmlns:a="http://schemas.openxmlformats.org/drawingml/2006/main">
+            <a:off x="914400" y="3181350"/>
+            <a:ext cx="4991100" cy="0"/>
           </a:xfrm>
           <a:prstGeom xmlns:a="http://schemas.openxmlformats.org/drawingml/2006/main" prst="line">
             <a:avLst/>
@@ -6149,1036 +6168,118 @@
       </p:sp>
       <p:sp>
         <p:nvSpPr>
-          <p:cNvPr id="17" name="FOREST STRATEGY · VISUAL CARRIER"/>
-          <p:cNvSpPr txBox="1"/>
-          <p:nvPr/>
-        </p:nvSpPr>
-        <p:spPr>
-          <a:xfrm xmlns:a="http://schemas.openxmlformats.org/drawingml/2006/main">
-            <a:off x="914400" y="228600"/>
-            <a:ext cx="9525000" cy="190500"/>
-          </a:xfrm>
-          <a:prstGeom xmlns:a="http://schemas.openxmlformats.org/drawingml/2006/main" prst="rect">
-            <a:avLst/>
-          </a:prstGeom>
-          <a:noFill xmlns:a="http://schemas.openxmlformats.org/drawingml/2006/main"/>
-          <a:ln xmlns:a="http://schemas.openxmlformats.org/drawingml/2006/main" w="0">
-            <a:noFill/>
-          </a:ln>
-        </p:spPr>
-        <p:txBody>
-          <a:bodyPr xmlns:a="http://schemas.openxmlformats.org/drawingml/2006/main" wrap="square" lIns="0" tIns="0" rIns="0" bIns="0" anchor="t"/>
-          <a:lstStyle xmlns:a="http://schemas.openxmlformats.org/drawingml/2006/main"/>
-          <a:p xmlns:a="http://schemas.openxmlformats.org/drawingml/2006/main">
-            <a:r>
-              <a:rPr lang="en-US" sz="1050" b="1">
+          <p:cNvPr id="17" name="section-body"/>
+          <p:cNvSpPr txBox="1"/>
+          <p:nvPr/>
+        </p:nvSpPr>
+        <p:spPr>
+          <a:xfrm xmlns:a="http://schemas.openxmlformats.org/drawingml/2006/main">
+            <a:off x="914400" y="3600450"/>
+            <a:ext cx="5334000" cy="819150"/>
+          </a:xfrm>
+          <a:prstGeom xmlns:a="http://schemas.openxmlformats.org/drawingml/2006/main" prst="rect">
+            <a:avLst/>
+          </a:prstGeom>
+          <a:noFill xmlns:a="http://schemas.openxmlformats.org/drawingml/2006/main"/>
+          <a:ln xmlns:a="http://schemas.openxmlformats.org/drawingml/2006/main" w="0">
+            <a:noFill/>
+          </a:ln>
+        </p:spPr>
+        <p:txBody>
+          <a:bodyPr xmlns:a="http://schemas.openxmlformats.org/drawingml/2006/main" wrap="square" lIns="0" tIns="0" rIns="0" bIns="0" anchor="t"/>
+          <a:lstStyle xmlns:a="http://schemas.openxmlformats.org/drawingml/2006/main"/>
+          <a:p xmlns:a="http://schemas.openxmlformats.org/drawingml/2006/main">
+            <a:r>
+              <a:rPr lang="en-US" sz="1800">
+                <a:solidFill>
+                  <a:srgbClr val="183A2A"/>
+                </a:solidFill>
+                <a:latin typeface="Arial"/>
+                <a:ea typeface="Arial"/>
+              </a:rPr>
+              <a:t>A single visual cue can make the recommendation easier to remember.</a:t>
+            </a:r>
+            <a:endParaRPr lang="en-US"/>
+          </a:p>
+        </p:txBody>
+      </p:sp>
+      <p:sp>
+        <p:nvSpPr>
+          <p:cNvPr id="18" name="section-note"/>
+          <p:cNvSpPr txBox="1"/>
+          <p:nvPr/>
+        </p:nvSpPr>
+        <p:spPr>
+          <a:xfrm xmlns:a="http://schemas.openxmlformats.org/drawingml/2006/main">
+            <a:off x="914400" y="5238750"/>
+            <a:ext cx="5334000" cy="228600"/>
+          </a:xfrm>
+          <a:prstGeom xmlns:a="http://schemas.openxmlformats.org/drawingml/2006/main" prst="rect">
+            <a:avLst/>
+          </a:prstGeom>
+          <a:noFill xmlns:a="http://schemas.openxmlformats.org/drawingml/2006/main"/>
+          <a:ln xmlns:a="http://schemas.openxmlformats.org/drawingml/2006/main" w="0">
+            <a:noFill/>
+          </a:ln>
+        </p:spPr>
+        <p:txBody>
+          <a:bodyPr xmlns:a="http://schemas.openxmlformats.org/drawingml/2006/main" wrap="square" lIns="0" tIns="0" rIns="0" bIns="0" anchor="t"/>
+          <a:lstStyle xmlns:a="http://schemas.openxmlformats.org/drawingml/2006/main"/>
+          <a:p xmlns:a="http://schemas.openxmlformats.org/drawingml/2006/main">
+            <a:r>
+              <a:rPr lang="en-US" sz="1125" b="1">
                 <a:solidFill>
                   <a:srgbClr val="2E8C5C"/>
                 </a:solidFill>
                 <a:latin typeface="Arial"/>
                 <a:ea typeface="Arial"/>
               </a:rPr>
-              <a:t>FOREST STRATEGY · VISUAL CARRIER</a:t>
-            </a:r>
-            <a:endParaRPr lang="en-US"/>
-          </a:p>
-        </p:txBody>
-      </p:sp>
-      <p:sp>
-        <p:nvSpPr>
-          <p:cNvPr id="18" name="visual-title"/>
-          <p:cNvSpPr txBox="1"/>
-          <p:nvPr/>
-        </p:nvSpPr>
-        <p:spPr>
-          <a:xfrm xmlns:a="http://schemas.openxmlformats.org/drawingml/2006/main">
-            <a:off x="914400" y="495300"/>
-            <a:ext cx="12001500" cy="457200"/>
-          </a:xfrm>
-          <a:prstGeom xmlns:a="http://schemas.openxmlformats.org/drawingml/2006/main" prst="rect">
-            <a:avLst/>
-          </a:prstGeom>
-          <a:noFill xmlns:a="http://schemas.openxmlformats.org/drawingml/2006/main"/>
-          <a:ln xmlns:a="http://schemas.openxmlformats.org/drawingml/2006/main" w="0">
-            <a:noFill/>
-          </a:ln>
-        </p:spPr>
-        <p:txBody>
-          <a:bodyPr xmlns:a="http://schemas.openxmlformats.org/drawingml/2006/main" wrap="square" lIns="0" tIns="0" rIns="0" bIns="0" anchor="t"/>
-          <a:lstStyle xmlns:a="http://schemas.openxmlformats.org/drawingml/2006/main"/>
-          <a:p xmlns:a="http://schemas.openxmlformats.org/drawingml/2006/main">
-            <a:r>
-              <a:rPr lang="en-US" sz="2550" b="1">
-                <a:solidFill>
-                  <a:srgbClr val="FFFFFF"/>
-                </a:solidFill>
-                <a:latin typeface="Arial"/>
-                <a:ea typeface="Arial"/>
-              </a:rPr>
-              <a:t>Make the choice legible</a:t>
-            </a:r>
-            <a:endParaRPr lang="en-US"/>
-          </a:p>
-        </p:txBody>
-      </p:sp>
-      <p:sp>
-        <p:nvSpPr>
-          <p:cNvPr id="19" name="visual-body"/>
-          <p:cNvSpPr txBox="1"/>
-          <p:nvPr/>
-        </p:nvSpPr>
-        <p:spPr>
-          <a:xfrm xmlns:a="http://schemas.openxmlformats.org/drawingml/2006/main">
-            <a:off x="952500" y="1066800"/>
-            <a:ext cx="11049000" cy="228600"/>
-          </a:xfrm>
-          <a:prstGeom xmlns:a="http://schemas.openxmlformats.org/drawingml/2006/main" prst="rect">
-            <a:avLst/>
-          </a:prstGeom>
-          <a:noFill xmlns:a="http://schemas.openxmlformats.org/drawingml/2006/main"/>
-          <a:ln xmlns:a="http://schemas.openxmlformats.org/drawingml/2006/main" w="0">
-            <a:noFill/>
-          </a:ln>
-        </p:spPr>
-        <p:txBody>
-          <a:bodyPr xmlns:a="http://schemas.openxmlformats.org/drawingml/2006/main" wrap="square" lIns="0" tIns="0" rIns="0" bIns="0" anchor="t"/>
-          <a:lstStyle xmlns:a="http://schemas.openxmlformats.org/drawingml/2006/main"/>
-          <a:p xmlns:a="http://schemas.openxmlformats.org/drawingml/2006/main">
-            <a:r>
-              <a:rPr lang="en-US" sz="1200">
-                <a:solidFill>
-                  <a:srgbClr val="F0F3F2"/>
-                </a:solidFill>
-                <a:latin typeface="Arial"/>
-                <a:ea typeface="Arial"/>
-              </a:rPr>
-              <a:t>A single visual cue can make the recommendation easier to remember.</a:t>
-            </a:r>
-            <a:endParaRPr lang="en-US"/>
-          </a:p>
-        </p:txBody>
-      </p:sp>
-      <p:sp>
-        <p:nvSpPr>
-          <p:cNvPr id="20" name="visual-process-rail"/>
-          <p:cNvSpPr/>
-          <p:nvPr/>
-        </p:nvSpPr>
-        <p:spPr>
-          <a:xfrm xmlns:a="http://schemas.openxmlformats.org/drawingml/2006/main">
-            <a:off x="1447800" y="3524250"/>
-            <a:ext cx="0" cy="2647950"/>
-          </a:xfrm>
-          <a:prstGeom xmlns:a="http://schemas.openxmlformats.org/drawingml/2006/main" prst="line">
-            <a:avLst/>
-          </a:prstGeom>
-          <a:noFill xmlns:a="http://schemas.openxmlformats.org/drawingml/2006/main"/>
-          <a:ln xmlns:a="http://schemas.openxmlformats.org/drawingml/2006/main" w="25400">
-            <a:solidFill>
-              <a:srgbClr val="8B9D94"/>
-            </a:solidFill>
-            <a:prstDash val="solid"/>
-          </a:ln>
-        </p:spPr>
-        <p:txBody>
-          <a:bodyPr xmlns:a="http://schemas.openxmlformats.org/drawingml/2006/main" wrap="square" lIns="0" tIns="0" rIns="0" bIns="0" anchor="t"/>
-          <a:lstStyle xmlns:a="http://schemas.openxmlformats.org/drawingml/2006/main"/>
-          <a:p xmlns:a="http://schemas.openxmlformats.org/drawingml/2006/main">
-            <a:r>
-              <a:rPr lang="en-US"/>
-              <a:t/>
-            </a:r>
-            <a:endParaRPr lang="en-US"/>
-          </a:p>
-        </p:txBody>
-      </p:sp>
-      <p:sp>
-        <p:nvSpPr>
-          <p:cNvPr id="21" name="visual-process-node-0"/>
-          <p:cNvSpPr/>
-          <p:nvPr/>
-        </p:nvSpPr>
-        <p:spPr>
-          <a:xfrm xmlns:a="http://schemas.openxmlformats.org/drawingml/2006/main">
-            <a:off x="1257300" y="3352800"/>
-            <a:ext cx="400050" cy="400050"/>
-          </a:xfrm>
-          <a:prstGeom xmlns:a="http://schemas.openxmlformats.org/drawingml/2006/main" prst="ellipse">
-            <a:avLst/>
-          </a:prstGeom>
-          <a:solidFill xmlns:a="http://schemas.openxmlformats.org/drawingml/2006/main">
-            <a:srgbClr val="F6F8F5"/>
-          </a:solidFill>
-          <a:ln xmlns:a="http://schemas.openxmlformats.org/drawingml/2006/main" w="38100">
-            <a:solidFill>
-              <a:srgbClr val="183A2A"/>
-            </a:solidFill>
-            <a:prstDash val="solid"/>
-          </a:ln>
-        </p:spPr>
-        <p:txBody>
-          <a:bodyPr xmlns:a="http://schemas.openxmlformats.org/drawingml/2006/main" wrap="square" lIns="0" tIns="0" rIns="0" bIns="0" anchor="t"/>
-          <a:lstStyle xmlns:a="http://schemas.openxmlformats.org/drawingml/2006/main"/>
-          <a:p xmlns:a="http://schemas.openxmlformats.org/drawingml/2006/main">
-            <a:r>
-              <a:rPr lang="en-US"/>
-              <a:t/>
-            </a:r>
-            <a:endParaRPr lang="en-US"/>
-          </a:p>
-        </p:txBody>
-      </p:sp>
-      <p:sp>
-        <p:nvSpPr>
-          <p:cNvPr id="22" name="visual-process-number-0"/>
-          <p:cNvSpPr txBox="1"/>
-          <p:nvPr/>
-        </p:nvSpPr>
-        <p:spPr>
-          <a:xfrm xmlns:a="http://schemas.openxmlformats.org/drawingml/2006/main">
-            <a:off x="1238250" y="3467100"/>
-            <a:ext cx="438150" cy="152400"/>
-          </a:xfrm>
-          <a:prstGeom xmlns:a="http://schemas.openxmlformats.org/drawingml/2006/main" prst="rect">
-            <a:avLst/>
-          </a:prstGeom>
-          <a:noFill xmlns:a="http://schemas.openxmlformats.org/drawingml/2006/main"/>
-          <a:ln xmlns:a="http://schemas.openxmlformats.org/drawingml/2006/main" w="0">
-            <a:noFill/>
-          </a:ln>
-        </p:spPr>
-        <p:txBody>
-          <a:bodyPr xmlns:a="http://schemas.openxmlformats.org/drawingml/2006/main" wrap="square" lIns="0" tIns="0" rIns="0" bIns="0" anchor="t"/>
-          <a:lstStyle xmlns:a="http://schemas.openxmlformats.org/drawingml/2006/main"/>
-          <a:p xmlns:a="http://schemas.openxmlformats.org/drawingml/2006/main">
-            <a:pPr algn="ctr"/>
-            <a:r>
-              <a:rPr lang="en-US" sz="900" b="1">
-                <a:solidFill>
-                  <a:srgbClr val="2E8C5C"/>
-                </a:solidFill>
-                <a:latin typeface="Arial"/>
-                <a:ea typeface="Arial"/>
-              </a:rPr>
-              <a:t>01</a:t>
-            </a:r>
-            <a:endParaRPr lang="en-US"/>
-          </a:p>
-        </p:txBody>
-      </p:sp>
-      <p:sp>
-        <p:nvSpPr>
-          <p:cNvPr id="23" name="visual-process-label-0"/>
-          <p:cNvSpPr txBox="1"/>
-          <p:nvPr/>
-        </p:nvSpPr>
-        <p:spPr>
-          <a:xfrm xmlns:a="http://schemas.openxmlformats.org/drawingml/2006/main">
-            <a:off x="1943100" y="3371850"/>
-            <a:ext cx="1714500" cy="228600"/>
-          </a:xfrm>
-          <a:prstGeom xmlns:a="http://schemas.openxmlformats.org/drawingml/2006/main" prst="rect">
-            <a:avLst/>
-          </a:prstGeom>
-          <a:noFill xmlns:a="http://schemas.openxmlformats.org/drawingml/2006/main"/>
-          <a:ln xmlns:a="http://schemas.openxmlformats.org/drawingml/2006/main" w="0">
-            <a:noFill/>
-          </a:ln>
-        </p:spPr>
-        <p:txBody>
-          <a:bodyPr xmlns:a="http://schemas.openxmlformats.org/drawingml/2006/main" wrap="square" lIns="0" tIns="0" rIns="0" bIns="0" anchor="t"/>
-          <a:lstStyle xmlns:a="http://schemas.openxmlformats.org/drawingml/2006/main"/>
-          <a:p xmlns:a="http://schemas.openxmlformats.org/drawingml/2006/main">
-            <a:r>
-              <a:rPr lang="en-US" sz="1650" b="1">
+              <a:t>ONE IMAGE · ONE THESIS · ONE TURN</a:t>
+            </a:r>
+            <a:endParaRPr lang="en-US"/>
+          </a:p>
+        </p:txBody>
+      </p:sp>
+      <p:sp>
+        <p:nvSpPr>
+          <p:cNvPr id="19" name="section-next"/>
+          <p:cNvSpPr txBox="1"/>
+          <p:nvPr/>
+        </p:nvSpPr>
+        <p:spPr>
+          <a:xfrm xmlns:a="http://schemas.openxmlformats.org/drawingml/2006/main">
+            <a:off x="914400" y="5772150"/>
+            <a:ext cx="5334000" cy="476250"/>
+          </a:xfrm>
+          <a:prstGeom xmlns:a="http://schemas.openxmlformats.org/drawingml/2006/main" prst="rect">
+            <a:avLst/>
+          </a:prstGeom>
+          <a:noFill xmlns:a="http://schemas.openxmlformats.org/drawingml/2006/main"/>
+          <a:ln xmlns:a="http://schemas.openxmlformats.org/drawingml/2006/main" w="0">
+            <a:noFill/>
+          </a:ln>
+        </p:spPr>
+        <p:txBody>
+          <a:bodyPr xmlns:a="http://schemas.openxmlformats.org/drawingml/2006/main" wrap="square" lIns="0" tIns="0" rIns="0" bIns="0" anchor="t"/>
+          <a:lstStyle xmlns:a="http://schemas.openxmlformats.org/drawingml/2006/main"/>
+          <a:p xmlns:a="http://schemas.openxmlformats.org/drawingml/2006/main">
+            <a:r>
+              <a:rPr lang="en-US" sz="2100" b="1">
                 <a:solidFill>
                   <a:srgbClr val="183A2A"/>
                 </a:solidFill>
                 <a:latin typeface="Arial"/>
                 <a:ea typeface="Arial"/>
               </a:rPr>
-              <a:t>Observe</a:t>
-            </a:r>
-            <a:endParaRPr lang="en-US"/>
-          </a:p>
-        </p:txBody>
-      </p:sp>
-      <p:sp>
-        <p:nvSpPr>
-          <p:cNvPr id="24" name="visual-process-text-0"/>
-          <p:cNvSpPr txBox="1"/>
-          <p:nvPr/>
-        </p:nvSpPr>
-        <p:spPr>
-          <a:xfrm xmlns:a="http://schemas.openxmlformats.org/drawingml/2006/main">
-            <a:off x="3829050" y="3400425"/>
-            <a:ext cx="2476500" cy="228600"/>
-          </a:xfrm>
-          <a:prstGeom xmlns:a="http://schemas.openxmlformats.org/drawingml/2006/main" prst="rect">
-            <a:avLst/>
-          </a:prstGeom>
-          <a:noFill xmlns:a="http://schemas.openxmlformats.org/drawingml/2006/main"/>
-          <a:ln xmlns:a="http://schemas.openxmlformats.org/drawingml/2006/main" w="0">
-            <a:noFill/>
-          </a:ln>
-        </p:spPr>
-        <p:txBody>
-          <a:bodyPr xmlns:a="http://schemas.openxmlformats.org/drawingml/2006/main" wrap="square" lIns="0" tIns="0" rIns="0" bIns="0" anchor="t"/>
-          <a:lstStyle xmlns:a="http://schemas.openxmlformats.org/drawingml/2006/main"/>
-          <a:p xmlns:a="http://schemas.openxmlformats.org/drawingml/2006/main">
-            <a:r>
-              <a:rPr lang="en-US" sz="1275">
-                <a:solidFill>
-                  <a:srgbClr val="8B9D94"/>
-                </a:solidFill>
-                <a:latin typeface="Arial"/>
-                <a:ea typeface="Arial"/>
-              </a:rPr>
-              <a:t>Find the signal</a:t>
-            </a:r>
-            <a:endParaRPr lang="en-US"/>
-          </a:p>
-        </p:txBody>
-      </p:sp>
-      <p:sp>
-        <p:nvSpPr>
-          <p:cNvPr id="25" name="visual-process-node-1"/>
-          <p:cNvSpPr/>
-          <p:nvPr/>
-        </p:nvSpPr>
-        <p:spPr>
-          <a:xfrm xmlns:a="http://schemas.openxmlformats.org/drawingml/2006/main">
-            <a:off x="1257300" y="4095750"/>
-            <a:ext cx="400050" cy="400050"/>
-          </a:xfrm>
-          <a:prstGeom xmlns:a="http://schemas.openxmlformats.org/drawingml/2006/main" prst="ellipse">
-            <a:avLst/>
-          </a:prstGeom>
-          <a:solidFill xmlns:a="http://schemas.openxmlformats.org/drawingml/2006/main">
-            <a:srgbClr val="F6F8F5"/>
-          </a:solidFill>
-          <a:ln xmlns:a="http://schemas.openxmlformats.org/drawingml/2006/main" w="38100">
-            <a:solidFill>
-              <a:srgbClr val="183A2A"/>
-            </a:solidFill>
-            <a:prstDash val="solid"/>
-          </a:ln>
-        </p:spPr>
-        <p:txBody>
-          <a:bodyPr xmlns:a="http://schemas.openxmlformats.org/drawingml/2006/main" wrap="square" lIns="0" tIns="0" rIns="0" bIns="0" anchor="t"/>
-          <a:lstStyle xmlns:a="http://schemas.openxmlformats.org/drawingml/2006/main"/>
-          <a:p xmlns:a="http://schemas.openxmlformats.org/drawingml/2006/main">
-            <a:r>
-              <a:rPr lang="en-US"/>
-              <a:t/>
-            </a:r>
-            <a:endParaRPr lang="en-US"/>
-          </a:p>
-        </p:txBody>
-      </p:sp>
-      <p:sp>
-        <p:nvSpPr>
-          <p:cNvPr id="26" name="visual-process-number-1"/>
-          <p:cNvSpPr txBox="1"/>
-          <p:nvPr/>
-        </p:nvSpPr>
-        <p:spPr>
-          <a:xfrm xmlns:a="http://schemas.openxmlformats.org/drawingml/2006/main">
-            <a:off x="1238250" y="4210050"/>
-            <a:ext cx="438150" cy="152400"/>
-          </a:xfrm>
-          <a:prstGeom xmlns:a="http://schemas.openxmlformats.org/drawingml/2006/main" prst="rect">
-            <a:avLst/>
-          </a:prstGeom>
-          <a:noFill xmlns:a="http://schemas.openxmlformats.org/drawingml/2006/main"/>
-          <a:ln xmlns:a="http://schemas.openxmlformats.org/drawingml/2006/main" w="0">
-            <a:noFill/>
-          </a:ln>
-        </p:spPr>
-        <p:txBody>
-          <a:bodyPr xmlns:a="http://schemas.openxmlformats.org/drawingml/2006/main" wrap="square" lIns="0" tIns="0" rIns="0" bIns="0" anchor="t"/>
-          <a:lstStyle xmlns:a="http://schemas.openxmlformats.org/drawingml/2006/main"/>
-          <a:p xmlns:a="http://schemas.openxmlformats.org/drawingml/2006/main">
-            <a:pPr algn="ctr"/>
-            <a:r>
-              <a:rPr lang="en-US" sz="900" b="1">
-                <a:solidFill>
-                  <a:srgbClr val="2E8C5C"/>
-                </a:solidFill>
-                <a:latin typeface="Arial"/>
-                <a:ea typeface="Arial"/>
-              </a:rPr>
-              <a:t>02</a:t>
-            </a:r>
-            <a:endParaRPr lang="en-US"/>
-          </a:p>
-        </p:txBody>
-      </p:sp>
-      <p:sp>
-        <p:nvSpPr>
-          <p:cNvPr id="27" name="visual-process-label-1"/>
-          <p:cNvSpPr txBox="1"/>
-          <p:nvPr/>
-        </p:nvSpPr>
-        <p:spPr>
-          <a:xfrm xmlns:a="http://schemas.openxmlformats.org/drawingml/2006/main">
-            <a:off x="1943100" y="4114800"/>
-            <a:ext cx="1714500" cy="228600"/>
-          </a:xfrm>
-          <a:prstGeom xmlns:a="http://schemas.openxmlformats.org/drawingml/2006/main" prst="rect">
-            <a:avLst/>
-          </a:prstGeom>
-          <a:noFill xmlns:a="http://schemas.openxmlformats.org/drawingml/2006/main"/>
-          <a:ln xmlns:a="http://schemas.openxmlformats.org/drawingml/2006/main" w="0">
-            <a:noFill/>
-          </a:ln>
-        </p:spPr>
-        <p:txBody>
-          <a:bodyPr xmlns:a="http://schemas.openxmlformats.org/drawingml/2006/main" wrap="square" lIns="0" tIns="0" rIns="0" bIns="0" anchor="t"/>
-          <a:lstStyle xmlns:a="http://schemas.openxmlformats.org/drawingml/2006/main"/>
-          <a:p xmlns:a="http://schemas.openxmlformats.org/drawingml/2006/main">
-            <a:r>
-              <a:rPr lang="en-US" sz="1650" b="1">
-                <a:solidFill>
-                  <a:srgbClr val="183A2A"/>
-                </a:solidFill>
-                <a:latin typeface="Arial"/>
-                <a:ea typeface="Arial"/>
-              </a:rPr>
-              <a:t>Explain</a:t>
-            </a:r>
-            <a:endParaRPr lang="en-US"/>
-          </a:p>
-        </p:txBody>
-      </p:sp>
-      <p:sp>
-        <p:nvSpPr>
-          <p:cNvPr id="28" name="visual-process-text-1"/>
-          <p:cNvSpPr txBox="1"/>
-          <p:nvPr/>
-        </p:nvSpPr>
-        <p:spPr>
-          <a:xfrm xmlns:a="http://schemas.openxmlformats.org/drawingml/2006/main">
-            <a:off x="3829050" y="4143375"/>
-            <a:ext cx="2476500" cy="228600"/>
-          </a:xfrm>
-          <a:prstGeom xmlns:a="http://schemas.openxmlformats.org/drawingml/2006/main" prst="rect">
-            <a:avLst/>
-          </a:prstGeom>
-          <a:noFill xmlns:a="http://schemas.openxmlformats.org/drawingml/2006/main"/>
-          <a:ln xmlns:a="http://schemas.openxmlformats.org/drawingml/2006/main" w="0">
-            <a:noFill/>
-          </a:ln>
-        </p:spPr>
-        <p:txBody>
-          <a:bodyPr xmlns:a="http://schemas.openxmlformats.org/drawingml/2006/main" wrap="square" lIns="0" tIns="0" rIns="0" bIns="0" anchor="t"/>
-          <a:lstStyle xmlns:a="http://schemas.openxmlformats.org/drawingml/2006/main"/>
-          <a:p xmlns:a="http://schemas.openxmlformats.org/drawingml/2006/main">
-            <a:r>
-              <a:rPr lang="en-US" sz="1275">
-                <a:solidFill>
-                  <a:srgbClr val="8B9D94"/>
-                </a:solidFill>
-                <a:latin typeface="Arial"/>
-                <a:ea typeface="Arial"/>
-              </a:rPr>
-              <a:t>Name the mechanism</a:t>
-            </a:r>
-            <a:endParaRPr lang="en-US"/>
-          </a:p>
-        </p:txBody>
-      </p:sp>
-      <p:sp>
-        <p:nvSpPr>
-          <p:cNvPr id="29" name="visual-process-node-2"/>
-          <p:cNvSpPr/>
-          <p:nvPr/>
-        </p:nvSpPr>
-        <p:spPr>
-          <a:xfrm xmlns:a="http://schemas.openxmlformats.org/drawingml/2006/main">
-            <a:off x="1257300" y="4838700"/>
-            <a:ext cx="400050" cy="400050"/>
-          </a:xfrm>
-          <a:prstGeom xmlns:a="http://schemas.openxmlformats.org/drawingml/2006/main" prst="ellipse">
-            <a:avLst/>
-          </a:prstGeom>
-          <a:solidFill xmlns:a="http://schemas.openxmlformats.org/drawingml/2006/main">
-            <a:srgbClr val="F6F8F5"/>
-          </a:solidFill>
-          <a:ln xmlns:a="http://schemas.openxmlformats.org/drawingml/2006/main" w="38100">
-            <a:solidFill>
-              <a:srgbClr val="183A2A"/>
-            </a:solidFill>
-            <a:prstDash val="solid"/>
-          </a:ln>
-        </p:spPr>
-        <p:txBody>
-          <a:bodyPr xmlns:a="http://schemas.openxmlformats.org/drawingml/2006/main" wrap="square" lIns="0" tIns="0" rIns="0" bIns="0" anchor="t"/>
-          <a:lstStyle xmlns:a="http://schemas.openxmlformats.org/drawingml/2006/main"/>
-          <a:p xmlns:a="http://schemas.openxmlformats.org/drawingml/2006/main">
-            <a:r>
-              <a:rPr lang="en-US"/>
-              <a:t/>
-            </a:r>
-            <a:endParaRPr lang="en-US"/>
-          </a:p>
-        </p:txBody>
-      </p:sp>
-      <p:sp>
-        <p:nvSpPr>
-          <p:cNvPr id="30" name="visual-process-number-2"/>
-          <p:cNvSpPr txBox="1"/>
-          <p:nvPr/>
-        </p:nvSpPr>
-        <p:spPr>
-          <a:xfrm xmlns:a="http://schemas.openxmlformats.org/drawingml/2006/main">
-            <a:off x="1238250" y="4953000"/>
-            <a:ext cx="438150" cy="152400"/>
-          </a:xfrm>
-          <a:prstGeom xmlns:a="http://schemas.openxmlformats.org/drawingml/2006/main" prst="rect">
-            <a:avLst/>
-          </a:prstGeom>
-          <a:noFill xmlns:a="http://schemas.openxmlformats.org/drawingml/2006/main"/>
-          <a:ln xmlns:a="http://schemas.openxmlformats.org/drawingml/2006/main" w="0">
-            <a:noFill/>
-          </a:ln>
-        </p:spPr>
-        <p:txBody>
-          <a:bodyPr xmlns:a="http://schemas.openxmlformats.org/drawingml/2006/main" wrap="square" lIns="0" tIns="0" rIns="0" bIns="0" anchor="t"/>
-          <a:lstStyle xmlns:a="http://schemas.openxmlformats.org/drawingml/2006/main"/>
-          <a:p xmlns:a="http://schemas.openxmlformats.org/drawingml/2006/main">
-            <a:pPr algn="ctr"/>
-            <a:r>
-              <a:rPr lang="en-US" sz="900" b="1">
-                <a:solidFill>
-                  <a:srgbClr val="2E8C5C"/>
-                </a:solidFill>
-                <a:latin typeface="Arial"/>
-                <a:ea typeface="Arial"/>
-              </a:rPr>
-              <a:t>03</a:t>
-            </a:r>
-            <a:endParaRPr lang="en-US"/>
-          </a:p>
-        </p:txBody>
-      </p:sp>
-      <p:sp>
-        <p:nvSpPr>
-          <p:cNvPr id="31" name="visual-process-label-2"/>
-          <p:cNvSpPr txBox="1"/>
-          <p:nvPr/>
-        </p:nvSpPr>
-        <p:spPr>
-          <a:xfrm xmlns:a="http://schemas.openxmlformats.org/drawingml/2006/main">
-            <a:off x="1943100" y="4857750"/>
-            <a:ext cx="1714500" cy="228600"/>
-          </a:xfrm>
-          <a:prstGeom xmlns:a="http://schemas.openxmlformats.org/drawingml/2006/main" prst="rect">
-            <a:avLst/>
-          </a:prstGeom>
-          <a:noFill xmlns:a="http://schemas.openxmlformats.org/drawingml/2006/main"/>
-          <a:ln xmlns:a="http://schemas.openxmlformats.org/drawingml/2006/main" w="0">
-            <a:noFill/>
-          </a:ln>
-        </p:spPr>
-        <p:txBody>
-          <a:bodyPr xmlns:a="http://schemas.openxmlformats.org/drawingml/2006/main" wrap="square" lIns="0" tIns="0" rIns="0" bIns="0" anchor="t"/>
-          <a:lstStyle xmlns:a="http://schemas.openxmlformats.org/drawingml/2006/main"/>
-          <a:p xmlns:a="http://schemas.openxmlformats.org/drawingml/2006/main">
-            <a:r>
-              <a:rPr lang="en-US" sz="1650" b="1">
-                <a:solidFill>
-                  <a:srgbClr val="183A2A"/>
-                </a:solidFill>
-                <a:latin typeface="Arial"/>
-                <a:ea typeface="Arial"/>
-              </a:rPr>
-              <a:t>Choose</a:t>
-            </a:r>
-            <a:endParaRPr lang="en-US"/>
-          </a:p>
-        </p:txBody>
-      </p:sp>
-      <p:sp>
-        <p:nvSpPr>
-          <p:cNvPr id="32" name="visual-process-text-2"/>
-          <p:cNvSpPr txBox="1"/>
-          <p:nvPr/>
-        </p:nvSpPr>
-        <p:spPr>
-          <a:xfrm xmlns:a="http://schemas.openxmlformats.org/drawingml/2006/main">
-            <a:off x="3829050" y="4886325"/>
-            <a:ext cx="2476500" cy="228600"/>
-          </a:xfrm>
-          <a:prstGeom xmlns:a="http://schemas.openxmlformats.org/drawingml/2006/main" prst="rect">
-            <a:avLst/>
-          </a:prstGeom>
-          <a:noFill xmlns:a="http://schemas.openxmlformats.org/drawingml/2006/main"/>
-          <a:ln xmlns:a="http://schemas.openxmlformats.org/drawingml/2006/main" w="0">
-            <a:noFill/>
-          </a:ln>
-        </p:spPr>
-        <p:txBody>
-          <a:bodyPr xmlns:a="http://schemas.openxmlformats.org/drawingml/2006/main" wrap="square" lIns="0" tIns="0" rIns="0" bIns="0" anchor="t"/>
-          <a:lstStyle xmlns:a="http://schemas.openxmlformats.org/drawingml/2006/main"/>
-          <a:p xmlns:a="http://schemas.openxmlformats.org/drawingml/2006/main">
-            <a:r>
-              <a:rPr lang="en-US" sz="1275">
-                <a:solidFill>
-                  <a:srgbClr val="8B9D94"/>
-                </a:solidFill>
-                <a:latin typeface="Arial"/>
-                <a:ea typeface="Arial"/>
-              </a:rPr>
-              <a:t>Set the condition</a:t>
-            </a:r>
-            <a:endParaRPr lang="en-US"/>
-          </a:p>
-        </p:txBody>
-      </p:sp>
-      <p:sp>
-        <p:nvSpPr>
-          <p:cNvPr id="33" name="visual-process-node-3"/>
-          <p:cNvSpPr/>
-          <p:nvPr/>
-        </p:nvSpPr>
-        <p:spPr>
-          <a:xfrm xmlns:a="http://schemas.openxmlformats.org/drawingml/2006/main">
-            <a:off x="1257300" y="5581650"/>
-            <a:ext cx="400050" cy="400050"/>
-          </a:xfrm>
-          <a:prstGeom xmlns:a="http://schemas.openxmlformats.org/drawingml/2006/main" prst="ellipse">
-            <a:avLst/>
-          </a:prstGeom>
-          <a:solidFill xmlns:a="http://schemas.openxmlformats.org/drawingml/2006/main">
-            <a:srgbClr val="2E8C5C"/>
-          </a:solidFill>
-          <a:ln xmlns:a="http://schemas.openxmlformats.org/drawingml/2006/main" w="38100">
-            <a:solidFill>
-              <a:srgbClr val="2E8C5C"/>
-            </a:solidFill>
-            <a:prstDash val="solid"/>
-          </a:ln>
-        </p:spPr>
-        <p:txBody>
-          <a:bodyPr xmlns:a="http://schemas.openxmlformats.org/drawingml/2006/main" wrap="square" lIns="0" tIns="0" rIns="0" bIns="0" anchor="t"/>
-          <a:lstStyle xmlns:a="http://schemas.openxmlformats.org/drawingml/2006/main"/>
-          <a:p xmlns:a="http://schemas.openxmlformats.org/drawingml/2006/main">
-            <a:r>
-              <a:rPr lang="en-US"/>
-              <a:t/>
-            </a:r>
-            <a:endParaRPr lang="en-US"/>
-          </a:p>
-        </p:txBody>
-      </p:sp>
-      <p:sp>
-        <p:nvSpPr>
-          <p:cNvPr id="34" name="visual-process-number-3"/>
-          <p:cNvSpPr txBox="1"/>
-          <p:nvPr/>
-        </p:nvSpPr>
-        <p:spPr>
-          <a:xfrm xmlns:a="http://schemas.openxmlformats.org/drawingml/2006/main">
-            <a:off x="1238250" y="5695950"/>
-            <a:ext cx="438150" cy="152400"/>
-          </a:xfrm>
-          <a:prstGeom xmlns:a="http://schemas.openxmlformats.org/drawingml/2006/main" prst="rect">
-            <a:avLst/>
-          </a:prstGeom>
-          <a:noFill xmlns:a="http://schemas.openxmlformats.org/drawingml/2006/main"/>
-          <a:ln xmlns:a="http://schemas.openxmlformats.org/drawingml/2006/main" w="0">
-            <a:noFill/>
-          </a:ln>
-        </p:spPr>
-        <p:txBody>
-          <a:bodyPr xmlns:a="http://schemas.openxmlformats.org/drawingml/2006/main" wrap="square" lIns="0" tIns="0" rIns="0" bIns="0" anchor="t"/>
-          <a:lstStyle xmlns:a="http://schemas.openxmlformats.org/drawingml/2006/main"/>
-          <a:p xmlns:a="http://schemas.openxmlformats.org/drawingml/2006/main">
-            <a:pPr algn="ctr"/>
-            <a:r>
-              <a:rPr lang="en-US" sz="900" b="1">
-                <a:solidFill>
-                  <a:srgbClr val="FFFFFF"/>
-                </a:solidFill>
-                <a:latin typeface="Arial"/>
-                <a:ea typeface="Arial"/>
-              </a:rPr>
-              <a:t>04</a:t>
-            </a:r>
-            <a:endParaRPr lang="en-US"/>
-          </a:p>
-        </p:txBody>
-      </p:sp>
-      <p:sp>
-        <p:nvSpPr>
-          <p:cNvPr id="35" name="visual-process-label-3"/>
-          <p:cNvSpPr txBox="1"/>
-          <p:nvPr/>
-        </p:nvSpPr>
-        <p:spPr>
-          <a:xfrm xmlns:a="http://schemas.openxmlformats.org/drawingml/2006/main">
-            <a:off x="1943100" y="5600700"/>
-            <a:ext cx="1714500" cy="228600"/>
-          </a:xfrm>
-          <a:prstGeom xmlns:a="http://schemas.openxmlformats.org/drawingml/2006/main" prst="rect">
-            <a:avLst/>
-          </a:prstGeom>
-          <a:noFill xmlns:a="http://schemas.openxmlformats.org/drawingml/2006/main"/>
-          <a:ln xmlns:a="http://schemas.openxmlformats.org/drawingml/2006/main" w="0">
-            <a:noFill/>
-          </a:ln>
-        </p:spPr>
-        <p:txBody>
-          <a:bodyPr xmlns:a="http://schemas.openxmlformats.org/drawingml/2006/main" wrap="square" lIns="0" tIns="0" rIns="0" bIns="0" anchor="t"/>
-          <a:lstStyle xmlns:a="http://schemas.openxmlformats.org/drawingml/2006/main"/>
-          <a:p xmlns:a="http://schemas.openxmlformats.org/drawingml/2006/main">
-            <a:r>
-              <a:rPr lang="en-US" sz="1650" b="1">
-                <a:solidFill>
-                  <a:srgbClr val="183A2A"/>
-                </a:solidFill>
-                <a:latin typeface="Arial"/>
-                <a:ea typeface="Arial"/>
-              </a:rPr>
-              <a:t>Act</a:t>
-            </a:r>
-            <a:endParaRPr lang="en-US"/>
-          </a:p>
-        </p:txBody>
-      </p:sp>
-      <p:sp>
-        <p:nvSpPr>
-          <p:cNvPr id="36" name="visual-process-text-3"/>
-          <p:cNvSpPr txBox="1"/>
-          <p:nvPr/>
-        </p:nvSpPr>
-        <p:spPr>
-          <a:xfrm xmlns:a="http://schemas.openxmlformats.org/drawingml/2006/main">
-            <a:off x="3829050" y="5629275"/>
-            <a:ext cx="2476500" cy="228600"/>
-          </a:xfrm>
-          <a:prstGeom xmlns:a="http://schemas.openxmlformats.org/drawingml/2006/main" prst="rect">
-            <a:avLst/>
-          </a:prstGeom>
-          <a:noFill xmlns:a="http://schemas.openxmlformats.org/drawingml/2006/main"/>
-          <a:ln xmlns:a="http://schemas.openxmlformats.org/drawingml/2006/main" w="0">
-            <a:noFill/>
-          </a:ln>
-        </p:spPr>
-        <p:txBody>
-          <a:bodyPr xmlns:a="http://schemas.openxmlformats.org/drawingml/2006/main" wrap="square" lIns="0" tIns="0" rIns="0" bIns="0" anchor="t"/>
-          <a:lstStyle xmlns:a="http://schemas.openxmlformats.org/drawingml/2006/main"/>
-          <a:p xmlns:a="http://schemas.openxmlformats.org/drawingml/2006/main">
-            <a:r>
-              <a:rPr lang="en-US" sz="1275">
-                <a:solidFill>
-                  <a:srgbClr val="8B9D94"/>
-                </a:solidFill>
-                <a:latin typeface="Arial"/>
-                <a:ea typeface="Arial"/>
-              </a:rPr>
-              <a:t>Return with proof</a:t>
-            </a:r>
-            <a:endParaRPr lang="en-US"/>
-          </a:p>
-        </p:txBody>
-      </p:sp>
-      <p:sp>
-        <p:nvSpPr>
-          <p:cNvPr id="37" name="visual-process-rule"/>
-          <p:cNvSpPr/>
-          <p:nvPr/>
-        </p:nvSpPr>
-        <p:spPr>
-          <a:xfrm xmlns:a="http://schemas.openxmlformats.org/drawingml/2006/main">
-            <a:off x="7239000" y="3486150"/>
-            <a:ext cx="0" cy="2705100"/>
-          </a:xfrm>
-          <a:prstGeom xmlns:a="http://schemas.openxmlformats.org/drawingml/2006/main" prst="line">
-            <a:avLst/>
-          </a:prstGeom>
-          <a:noFill xmlns:a="http://schemas.openxmlformats.org/drawingml/2006/main"/>
-          <a:ln xmlns:a="http://schemas.openxmlformats.org/drawingml/2006/main" w="12700">
-            <a:solidFill>
-              <a:srgbClr val="8B9D94"/>
-            </a:solidFill>
-            <a:prstDash val="solid"/>
-          </a:ln>
-        </p:spPr>
-        <p:txBody>
-          <a:bodyPr xmlns:a="http://schemas.openxmlformats.org/drawingml/2006/main" wrap="square" lIns="0" tIns="0" rIns="0" bIns="0" anchor="t"/>
-          <a:lstStyle xmlns:a="http://schemas.openxmlformats.org/drawingml/2006/main"/>
-          <a:p xmlns:a="http://schemas.openxmlformats.org/drawingml/2006/main">
-            <a:r>
-              <a:rPr lang="en-US"/>
-              <a:t/>
-            </a:r>
-            <a:endParaRPr lang="en-US"/>
-          </a:p>
-        </p:txBody>
-      </p:sp>
-      <p:sp>
-        <p:nvSpPr>
-          <p:cNvPr id="38" name="visual-process-note-label"/>
-          <p:cNvSpPr txBox="1"/>
-          <p:nvPr/>
-        </p:nvSpPr>
-        <p:spPr>
-          <a:xfrm xmlns:a="http://schemas.openxmlformats.org/drawingml/2006/main">
-            <a:off x="8001000" y="3562350"/>
-            <a:ext cx="3429000" cy="228600"/>
-          </a:xfrm>
-          <a:prstGeom xmlns:a="http://schemas.openxmlformats.org/drawingml/2006/main" prst="rect">
-            <a:avLst/>
-          </a:prstGeom>
-          <a:noFill xmlns:a="http://schemas.openxmlformats.org/drawingml/2006/main"/>
-          <a:ln xmlns:a="http://schemas.openxmlformats.org/drawingml/2006/main" w="0">
-            <a:noFill/>
-          </a:ln>
-        </p:spPr>
-        <p:txBody>
-          <a:bodyPr xmlns:a="http://schemas.openxmlformats.org/drawingml/2006/main" wrap="square" lIns="0" tIns="0" rIns="0" bIns="0" anchor="t"/>
-          <a:lstStyle xmlns:a="http://schemas.openxmlformats.org/drawingml/2006/main"/>
-          <a:p xmlns:a="http://schemas.openxmlformats.org/drawingml/2006/main">
-            <a:r>
-              <a:rPr lang="en-US" sz="1125" b="1">
-                <a:solidFill>
-                  <a:srgbClr val="2E8C5C"/>
-                </a:solidFill>
-                <a:latin typeface="Arial"/>
-                <a:ea typeface="Arial"/>
-              </a:rPr>
-              <a:t>PROCESS CARRIER</a:t>
-            </a:r>
-            <a:endParaRPr lang="en-US"/>
-          </a:p>
-        </p:txBody>
-      </p:sp>
-      <p:sp>
-        <p:nvSpPr>
-          <p:cNvPr id="39" name="visual-process-note-title"/>
-          <p:cNvSpPr txBox="1"/>
-          <p:nvPr/>
-        </p:nvSpPr>
-        <p:spPr>
-          <a:xfrm xmlns:a="http://schemas.openxmlformats.org/drawingml/2006/main">
-            <a:off x="8001000" y="4038600"/>
-            <a:ext cx="4381500" cy="685800"/>
-          </a:xfrm>
-          <a:prstGeom xmlns:a="http://schemas.openxmlformats.org/drawingml/2006/main" prst="rect">
-            <a:avLst/>
-          </a:prstGeom>
-          <a:noFill xmlns:a="http://schemas.openxmlformats.org/drawingml/2006/main"/>
-          <a:ln xmlns:a="http://schemas.openxmlformats.org/drawingml/2006/main" w="0">
-            <a:noFill/>
-          </a:ln>
-        </p:spPr>
-        <p:txBody>
-          <a:bodyPr xmlns:a="http://schemas.openxmlformats.org/drawingml/2006/main" wrap="square" lIns="0" tIns="0" rIns="0" bIns="0" anchor="t"/>
-          <a:lstStyle xmlns:a="http://schemas.openxmlformats.org/drawingml/2006/main"/>
-          <a:p xmlns:a="http://schemas.openxmlformats.org/drawingml/2006/main">
-            <a:r>
-              <a:rPr lang="en-US" sz="2250" b="1">
-                <a:solidFill>
-                  <a:srgbClr val="183A2A"/>
-                </a:solidFill>
-                <a:latin typeface="Arial"/>
-                <a:ea typeface="Arial"/>
-              </a:rPr>
-              <a:t>A relationship earns a line.</a:t>
-            </a:r>
-            <a:endParaRPr lang="en-US"/>
-          </a:p>
-        </p:txBody>
-      </p:sp>
-      <p:sp>
-        <p:nvSpPr>
-          <p:cNvPr id="40" name="visual-process-note-body"/>
-          <p:cNvSpPr txBox="1"/>
-          <p:nvPr/>
-        </p:nvSpPr>
-        <p:spPr>
-          <a:xfrm xmlns:a="http://schemas.openxmlformats.org/drawingml/2006/main">
-            <a:off x="8001000" y="5048250"/>
-            <a:ext cx="4572000" cy="685800"/>
-          </a:xfrm>
-          <a:prstGeom xmlns:a="http://schemas.openxmlformats.org/drawingml/2006/main" prst="rect">
-            <a:avLst/>
-          </a:prstGeom>
-          <a:noFill xmlns:a="http://schemas.openxmlformats.org/drawingml/2006/main"/>
-          <a:ln xmlns:a="http://schemas.openxmlformats.org/drawingml/2006/main" w="0">
-            <a:noFill/>
-          </a:ln>
-        </p:spPr>
-        <p:txBody>
-          <a:bodyPr xmlns:a="http://schemas.openxmlformats.org/drawingml/2006/main" wrap="square" lIns="0" tIns="0" rIns="0" bIns="0" anchor="t"/>
-          <a:lstStyle xmlns:a="http://schemas.openxmlformats.org/drawingml/2006/main"/>
-          <a:p xmlns:a="http://schemas.openxmlformats.org/drawingml/2006/main">
-            <a:r>
-              <a:rPr lang="en-US" sz="1275">
-                <a:solidFill>
-                  <a:srgbClr val="8B9D94"/>
-                </a:solidFill>
-                <a:latin typeface="Arial"/>
-                <a:ea typeface="Arial"/>
-              </a:rPr>
-              <a:t>Use sequence, direction and conditions to make the mechanism visible. If the relationship is not real, remove the arrow.</a:t>
-            </a:r>
-            <a:endParaRPr lang="en-US"/>
-          </a:p>
-        </p:txBody>
-      </p:sp>
-      <p:sp>
-        <p:nvSpPr>
-          <p:cNvPr id="41" name="visual-note"/>
-          <p:cNvSpPr/>
-          <p:nvPr/>
-        </p:nvSpPr>
-        <p:spPr>
-          <a:xfrm xmlns:a="http://schemas.openxmlformats.org/drawingml/2006/main">
-            <a:off x="11049000" y="3333750"/>
-            <a:ext cx="3048000" cy="2381250"/>
-          </a:xfrm>
-          <a:prstGeom xmlns:a="http://schemas.openxmlformats.org/drawingml/2006/main" prst="rect">
-            <a:avLst/>
-          </a:prstGeom>
-          <a:solidFill xmlns:a="http://schemas.openxmlformats.org/drawingml/2006/main">
-            <a:srgbClr val="F3F5F8"/>
-          </a:solidFill>
-          <a:ln xmlns:a="http://schemas.openxmlformats.org/drawingml/2006/main" w="12700">
-            <a:solidFill>
-              <a:srgbClr val="8B9D94"/>
-            </a:solidFill>
-            <a:prstDash val="solid"/>
-          </a:ln>
-        </p:spPr>
-        <p:txBody>
-          <a:bodyPr xmlns:a="http://schemas.openxmlformats.org/drawingml/2006/main" wrap="square" lIns="0" tIns="0" rIns="0" bIns="0" anchor="t"/>
-          <a:lstStyle xmlns:a="http://schemas.openxmlformats.org/drawingml/2006/main"/>
-          <a:p xmlns:a="http://schemas.openxmlformats.org/drawingml/2006/main">
-            <a:r>
-              <a:rPr lang="en-US"/>
-              <a:t/>
-            </a:r>
-            <a:endParaRPr lang="en-US"/>
-          </a:p>
-        </p:txBody>
-      </p:sp>
-      <p:sp>
-        <p:nvSpPr>
-          <p:cNvPr id="42" name="visual-note-label"/>
-          <p:cNvSpPr txBox="1"/>
-          <p:nvPr/>
-        </p:nvSpPr>
-        <p:spPr>
-          <a:xfrm xmlns:a="http://schemas.openxmlformats.org/drawingml/2006/main">
-            <a:off x="11430000" y="3695700"/>
-            <a:ext cx="2286000" cy="228600"/>
-          </a:xfrm>
-          <a:prstGeom xmlns:a="http://schemas.openxmlformats.org/drawingml/2006/main" prst="rect">
-            <a:avLst/>
-          </a:prstGeom>
-          <a:noFill xmlns:a="http://schemas.openxmlformats.org/drawingml/2006/main"/>
-          <a:ln xmlns:a="http://schemas.openxmlformats.org/drawingml/2006/main" w="0">
-            <a:noFill/>
-          </a:ln>
-        </p:spPr>
-        <p:txBody>
-          <a:bodyPr xmlns:a="http://schemas.openxmlformats.org/drawingml/2006/main" wrap="square" lIns="0" tIns="0" rIns="0" bIns="0" anchor="t"/>
-          <a:lstStyle xmlns:a="http://schemas.openxmlformats.org/drawingml/2006/main"/>
-          <a:p xmlns:a="http://schemas.openxmlformats.org/drawingml/2006/main">
-            <a:r>
-              <a:rPr lang="en-US" sz="1125" b="1">
-                <a:solidFill>
-                  <a:srgbClr val="2E8C5C"/>
-                </a:solidFill>
-                <a:latin typeface="Arial"/>
-                <a:ea typeface="Arial"/>
-              </a:rPr>
-              <a:t>CARRIER</a:t>
-            </a:r>
-            <a:endParaRPr lang="en-US"/>
-          </a:p>
-        </p:txBody>
-      </p:sp>
-      <p:sp>
-        <p:nvSpPr>
-          <p:cNvPr id="43" name="visual-note-text"/>
-          <p:cNvSpPr txBox="1"/>
-          <p:nvPr/>
-        </p:nvSpPr>
-        <p:spPr>
-          <a:xfrm xmlns:a="http://schemas.openxmlformats.org/drawingml/2006/main">
-            <a:off x="11430000" y="4171950"/>
-            <a:ext cx="2286000" cy="723900"/>
-          </a:xfrm>
-          <a:prstGeom xmlns:a="http://schemas.openxmlformats.org/drawingml/2006/main" prst="rect">
-            <a:avLst/>
-          </a:prstGeom>
-          <a:noFill xmlns:a="http://schemas.openxmlformats.org/drawingml/2006/main"/>
-          <a:ln xmlns:a="http://schemas.openxmlformats.org/drawingml/2006/main" w="0">
-            <a:noFill/>
-          </a:ln>
-        </p:spPr>
-        <p:txBody>
-          <a:bodyPr xmlns:a="http://schemas.openxmlformats.org/drawingml/2006/main" wrap="square" lIns="0" tIns="0" rIns="0" bIns="0" anchor="t"/>
-          <a:lstStyle xmlns:a="http://schemas.openxmlformats.org/drawingml/2006/main"/>
-          <a:p xmlns:a="http://schemas.openxmlformats.org/drawingml/2006/main">
-            <a:r>
-              <a:rPr lang="en-US" sz="2100" b="1">
-                <a:solidFill>
-                  <a:srgbClr val="183A2A"/>
-                </a:solidFill>
-                <a:latin typeface="Arial"/>
-                <a:ea typeface="Arial"/>
-              </a:rPr>
-              <a:t>Choice before inventory</a:t>
-            </a:r>
-            <a:endParaRPr lang="en-US"/>
-          </a:p>
-        </p:txBody>
-      </p:sp>
-      <p:sp>
-        <p:nvSpPr>
-          <p:cNvPr id="44" name="visual-note-foot"/>
-          <p:cNvSpPr txBox="1"/>
-          <p:nvPr/>
-        </p:nvSpPr>
-        <p:spPr>
-          <a:xfrm xmlns:a="http://schemas.openxmlformats.org/drawingml/2006/main">
-            <a:off x="11430000" y="5219700"/>
-            <a:ext cx="2286000" cy="457200"/>
-          </a:xfrm>
-          <a:prstGeom xmlns:a="http://schemas.openxmlformats.org/drawingml/2006/main" prst="rect">
-            <a:avLst/>
-          </a:prstGeom>
-          <a:noFill xmlns:a="http://schemas.openxmlformats.org/drawingml/2006/main"/>
-          <a:ln xmlns:a="http://schemas.openxmlformats.org/drawingml/2006/main" w="0">
-            <a:noFill/>
-          </a:ln>
-        </p:spPr>
-        <p:txBody>
-          <a:bodyPr xmlns:a="http://schemas.openxmlformats.org/drawingml/2006/main" wrap="square" lIns="0" tIns="0" rIns="0" bIns="0" anchor="t"/>
-          <a:lstStyle xmlns:a="http://schemas.openxmlformats.org/drawingml/2006/main"/>
-          <a:p xmlns:a="http://schemas.openxmlformats.org/drawingml/2006/main">
-            <a:r>
-              <a:rPr lang="en-US" sz="1200">
-                <a:solidFill>
-                  <a:srgbClr val="8B9D94"/>
-                </a:solidFill>
-                <a:latin typeface="Arial"/>
-                <a:ea typeface="Arial"/>
-              </a:rPr>
-              <a:t>Read the mark, unit, and basis.</a:t>
-            </a:r>
-            <a:endParaRPr lang="en-US"/>
-          </a:p>
-        </p:txBody>
-      </p:sp>
-      <p:sp>
-        <p:nvSpPr>
-          <p:cNvPr id="45" name="source"/>
+              <a:t>Approve one lever</a:t>
+            </a:r>
+            <a:endParaRPr lang="en-US"/>
+          </a:p>
+        </p:txBody>
+      </p:sp>
+      <p:sp>
+        <p:nvSpPr>
+          <p:cNvPr id="20" name="source"/>
           <p:cNvSpPr txBox="1"/>
           <p:nvPr/>
         </p:nvSpPr>
@@ -7215,7 +6316,7 @@
       </p:sp>
       <p:sp>
         <p:nvSpPr>
-          <p:cNvPr id="46" name="page-number"/>
+          <p:cNvPr id="21" name="page-number"/>
           <p:cNvSpPr txBox="1"/>
           <p:nvPr/>
         </p:nvSpPr>
@@ -7731,8 +6832,8 @@
           <p:nvPr/>
         </p:nvPicPr>
         <p:blipFill>
-          <a:blip xmlns:r="http://schemas.openxmlformats.org/officeDocument/2006/relationships" xmlns:a="http://schemas.openxmlformats.org/drawingml/2006/main" r:embed="rIdOfficeKitImaged71bfa074cda59bb_1"/>
-          <a:srcRect xmlns:a="http://schemas.openxmlformats.org/drawingml/2006/main" l="0" t="47258" r="0" b="47258"/>
+          <a:blip xmlns:r="http://schemas.openxmlformats.org/officeDocument/2006/relationships" xmlns:a="http://schemas.openxmlformats.org/drawingml/2006/main" r:embed="rIdOfficeKitImagee4bd683f73b7a543_1"/>
+          <a:srcRect xmlns:a="http://schemas.openxmlformats.org/drawingml/2006/main" l="0" t="47256" r="0" b="47256"/>
           <a:stretch xmlns:a="http://schemas.openxmlformats.org/drawingml/2006/main">
             <a:fillRect/>
           </a:stretch>

--- a/skills/presentation-template-library/skills/artifact-template-forest-strategy/assets/reference.pptx
+++ b/skills/presentation-template-library/skills/artifact-template-forest-strategy/assets/reference.pptx
@@ -484,7 +484,7 @@
     <p:bg>
       <p:bgPr>
         <a:blipFill xmlns:a="http://schemas.openxmlformats.org/drawingml/2006/main">
-          <a:blip xmlns:r="http://schemas.openxmlformats.org/officeDocument/2006/relationships" r:embed="rIdOfficeKitImagee4bd683f73b7a543_1"/>
+          <a:blip xmlns:r="http://schemas.openxmlformats.org/officeDocument/2006/relationships" r:embed="rIdOfficeKitImage283e3eeb8530a9d2_1"/>
           <a:stretch>
             <a:fillRect/>
           </a:stretch>
@@ -1897,8 +1897,8 @@
           <p:nvPr/>
         </p:nvPicPr>
         <p:blipFill>
-          <a:blip xmlns:r="http://schemas.openxmlformats.org/officeDocument/2006/relationships" xmlns:a="http://schemas.openxmlformats.org/drawingml/2006/main" r:embed="rIdOfficeKitImage9df32179333a9f35_1"/>
-          <a:srcRect xmlns:a="http://schemas.openxmlformats.org/drawingml/2006/main" l="0" t="47258" r="0" b="47258"/>
+          <a:blip xmlns:r="http://schemas.openxmlformats.org/officeDocument/2006/relationships" xmlns:a="http://schemas.openxmlformats.org/drawingml/2006/main" r:embed="rIdOfficeKitImageb7d7d39d00e5a7e4_1"/>
+          <a:srcRect xmlns:a="http://schemas.openxmlformats.org/drawingml/2006/main" l="0" t="47256" r="0" b="47256"/>
           <a:stretch xmlns:a="http://schemas.openxmlformats.org/drawingml/2006/main">
             <a:fillRect/>
           </a:stretch>
@@ -3458,7 +3458,7 @@
           <p:nvPr/>
         </p:nvPicPr>
         <p:blipFill>
-          <a:blip xmlns:r="http://schemas.openxmlformats.org/officeDocument/2006/relationships" xmlns:a="http://schemas.openxmlformats.org/drawingml/2006/main" r:embed="rIdOfficeKitImage283e3eeb8530a9d2_1"/>
+          <a:blip xmlns:r="http://schemas.openxmlformats.org/officeDocument/2006/relationships" xmlns:a="http://schemas.openxmlformats.org/drawingml/2006/main" r:embed="rIdOfficeKitImage083106afebc7d419_1"/>
           <a:srcRect xmlns:a="http://schemas.openxmlformats.org/drawingml/2006/main" l="0" t="47258" r="0" b="47258"/>
           <a:stretch xmlns:a="http://schemas.openxmlformats.org/drawingml/2006/main">
             <a:fillRect/>
@@ -3671,7 +3671,7 @@
         </p:xfrm>
         <a:graphic xmlns:a="http://schemas.openxmlformats.org/drawingml/2006/main">
           <a:graphicData uri="http://schemas.openxmlformats.org/drawingml/2006/chart">
-            <c:chart xmlns:r="http://schemas.openxmlformats.org/officeDocument/2006/relationships" xmlns:c="http://schemas.openxmlformats.org/drawingml/2006/chart" r:id="Rb5e762488e454ded"/>
+            <c:chart xmlns:r="http://schemas.openxmlformats.org/officeDocument/2006/relationships" xmlns:c="http://schemas.openxmlformats.org/drawingml/2006/chart" r:id="Rfbb0abef9f6c4ba5"/>
           </a:graphicData>
         </a:graphic>
       </p:graphicFrame>
@@ -3689,7 +3689,7 @@
         </p:xfrm>
         <a:graphic xmlns:a="http://schemas.openxmlformats.org/drawingml/2006/main">
           <a:graphicData uri="http://schemas.openxmlformats.org/drawingml/2006/chart">
-            <c:chart xmlns:r="http://schemas.openxmlformats.org/officeDocument/2006/relationships" xmlns:c="http://schemas.openxmlformats.org/drawingml/2006/chart" r:id="Rc8bddcbcc79b4dd1"/>
+            <c:chart xmlns:r="http://schemas.openxmlformats.org/officeDocument/2006/relationships" xmlns:c="http://schemas.openxmlformats.org/drawingml/2006/chart" r:id="R3035bc50e2db40f6"/>
           </a:graphicData>
         </a:graphic>
       </p:graphicFrame>
@@ -4466,7 +4466,7 @@
           <p:nvPr/>
         </p:nvPicPr>
         <p:blipFill>
-          <a:blip xmlns:r="http://schemas.openxmlformats.org/officeDocument/2006/relationships" xmlns:a="http://schemas.openxmlformats.org/drawingml/2006/main" r:embed="rIdOfficeKitImageb7d7d39d00e5a7e4_1"/>
+          <a:blip xmlns:r="http://schemas.openxmlformats.org/officeDocument/2006/relationships" xmlns:a="http://schemas.openxmlformats.org/drawingml/2006/main" r:embed="rIdOfficeKitImagee4bd683f73b7a543_1"/>
           <a:srcRect xmlns:a="http://schemas.openxmlformats.org/drawingml/2006/main" l="0" t="47256" r="0" b="47256"/>
           <a:stretch xmlns:a="http://schemas.openxmlformats.org/drawingml/2006/main">
             <a:fillRect/>
@@ -5593,7 +5593,7 @@
     <p:bg>
       <p:bgPr>
         <a:blipFill xmlns:a="http://schemas.openxmlformats.org/drawingml/2006/main">
-          <a:blip xmlns:r="http://schemas.openxmlformats.org/officeDocument/2006/relationships" r:embed="rIdOfficeKitImage083106afebc7d419_1"/>
+          <a:blip xmlns:r="http://schemas.openxmlformats.org/officeDocument/2006/relationships" r:embed="rIdOfficeKitImage9df32179333a9f35_1"/>
           <a:stretch>
             <a:fillRect/>
           </a:stretch>
@@ -6832,8 +6832,8 @@
           <p:nvPr/>
         </p:nvPicPr>
         <p:blipFill>
-          <a:blip xmlns:r="http://schemas.openxmlformats.org/officeDocument/2006/relationships" xmlns:a="http://schemas.openxmlformats.org/drawingml/2006/main" r:embed="rIdOfficeKitImagee4bd683f73b7a543_1"/>
-          <a:srcRect xmlns:a="http://schemas.openxmlformats.org/drawingml/2006/main" l="0" t="47256" r="0" b="47256"/>
+          <a:blip xmlns:r="http://schemas.openxmlformats.org/officeDocument/2006/relationships" xmlns:a="http://schemas.openxmlformats.org/drawingml/2006/main" r:embed="rIdOfficeKitImage283e3eeb8530a9d2_1"/>
+          <a:srcRect xmlns:a="http://schemas.openxmlformats.org/drawingml/2006/main" l="0" t="47258" r="0" b="47258"/>
           <a:stretch xmlns:a="http://schemas.openxmlformats.org/drawingml/2006/main">
             <a:fillRect/>
           </a:stretch>

--- a/skills/presentation-template-library/skills/artifact-template-forest-strategy/assets/reference.pptx
+++ b/skills/presentation-template-library/skills/artifact-template-forest-strategy/assets/reference.pptx
@@ -3671,7 +3671,7 @@
         </p:xfrm>
         <a:graphic xmlns:a="http://schemas.openxmlformats.org/drawingml/2006/main">
           <a:graphicData uri="http://schemas.openxmlformats.org/drawingml/2006/chart">
-            <c:chart xmlns:r="http://schemas.openxmlformats.org/officeDocument/2006/relationships" xmlns:c="http://schemas.openxmlformats.org/drawingml/2006/chart" r:id="Rfbb0abef9f6c4ba5"/>
+            <c:chart xmlns:r="http://schemas.openxmlformats.org/officeDocument/2006/relationships" xmlns:c="http://schemas.openxmlformats.org/drawingml/2006/chart" r:id="Rff687443849348f4"/>
           </a:graphicData>
         </a:graphic>
       </p:graphicFrame>
@@ -3689,7 +3689,7 @@
         </p:xfrm>
         <a:graphic xmlns:a="http://schemas.openxmlformats.org/drawingml/2006/main">
           <a:graphicData uri="http://schemas.openxmlformats.org/drawingml/2006/chart">
-            <c:chart xmlns:r="http://schemas.openxmlformats.org/officeDocument/2006/relationships" xmlns:c="http://schemas.openxmlformats.org/drawingml/2006/chart" r:id="R3035bc50e2db40f6"/>
+            <c:chart xmlns:r="http://schemas.openxmlformats.org/officeDocument/2006/relationships" xmlns:c="http://schemas.openxmlformats.org/drawingml/2006/chart" r:id="Reb1c1d2fc9064792"/>
           </a:graphicData>
         </a:graphic>
       </p:graphicFrame>
@@ -6832,8 +6832,8 @@
           <p:nvPr/>
         </p:nvPicPr>
         <p:blipFill>
-          <a:blip xmlns:r="http://schemas.openxmlformats.org/officeDocument/2006/relationships" xmlns:a="http://schemas.openxmlformats.org/drawingml/2006/main" r:embed="rIdOfficeKitImage283e3eeb8530a9d2_1"/>
-          <a:srcRect xmlns:a="http://schemas.openxmlformats.org/drawingml/2006/main" l="0" t="47258" r="0" b="47258"/>
+          <a:blip xmlns:r="http://schemas.openxmlformats.org/officeDocument/2006/relationships" xmlns:a="http://schemas.openxmlformats.org/drawingml/2006/main" r:embed="rIdOfficeKitImage4786b3004943cd8a_1"/>
+          <a:srcRect xmlns:a="http://schemas.openxmlformats.org/drawingml/2006/main" l="0" t="47256" r="0" b="47256"/>
           <a:stretch xmlns:a="http://schemas.openxmlformats.org/drawingml/2006/main">
             <a:fillRect/>
           </a:stretch>

--- a/skills/presentation-template-library/skills/artifact-template-forest-strategy/assets/reference.pptx
+++ b/skills/presentation-template-library/skills/artifact-template-forest-strategy/assets/reference.pptx
@@ -194,297 +194,13 @@
 </a:theme>
 </file>
 
-<file path=ppt/slides/charts/chart1.xml><?xml version="1.0" encoding="utf-8"?>
-<c:chartSpace xmlns:c="http://schemas.openxmlformats.org/drawingml/2006/chart" xmlns:a="http://schemas.openxmlformats.org/drawingml/2006/main">
-  <c:chart>
-    <c:title>
-      <c:tx>
-        <c:rich>
-          <a:bodyPr/>
-          <a:lstStyle/>
-          <a:p>
-            <a:r>
-              <a:t>Primary signal · observed versus reference</a:t>
-            </a:r>
-          </a:p>
-        </c:rich>
-      </c:tx>
-      <c:layout/>
-    </c:title>
-    <c:plotArea>
-      <c:layout/>
-      <c:barChart>
-        <c:barDir val="col"/>
-        <c:grouping val="clustered"/>
-        <c:ser>
-          <c:idx val="0"/>
-          <c:order val="0"/>
-          <c:tx>
-            <c:v>Observed</c:v>
-          </c:tx>
-          <c:spPr>
-            <a:solidFill>
-              <a:srgbClr val="2E8C5C"/>
-            </a:solidFill>
-          </c:spPr>
-          <c:cat>
-            <c:strLit>
-              <c:ptCount val="6"/>
-              <c:pt idx="0">
-                <c:v>Q1</c:v>
-              </c:pt>
-              <c:pt idx="1">
-                <c:v>Q2</c:v>
-              </c:pt>
-              <c:pt idx="2">
-                <c:v>Q3</c:v>
-              </c:pt>
-              <c:pt idx="3">
-                <c:v>Q4</c:v>
-              </c:pt>
-              <c:pt idx="4">
-                <c:v>Q5</c:v>
-              </c:pt>
-              <c:pt idx="5">
-                <c:v>Q6</c:v>
-              </c:pt>
-            </c:strLit>
-          </c:cat>
-          <c:val>
-            <c:numLit>
-              <c:formatCode>General</c:formatCode>
-              <c:ptCount val="6"/>
-              <c:pt idx="0">
-                <c:v>38</c:v>
-              </c:pt>
-              <c:pt idx="1">
-                <c:v>46</c:v>
-              </c:pt>
-              <c:pt idx="2">
-                <c:v>43</c:v>
-              </c:pt>
-              <c:pt idx="3">
-                <c:v>58</c:v>
-              </c:pt>
-              <c:pt idx="4">
-                <c:v>68</c:v>
-              </c:pt>
-              <c:pt idx="5">
-                <c:v>74</c:v>
-              </c:pt>
-            </c:numLit>
-          </c:val>
-        </c:ser>
-        <c:ser>
-          <c:idx val="1"/>
-          <c:order val="1"/>
-          <c:tx>
-            <c:v>Reference</c:v>
-          </c:tx>
-          <c:spPr>
-            <a:solidFill>
-              <a:srgbClr val="8B9D94"/>
-            </a:solidFill>
-          </c:spPr>
-          <c:cat>
-            <c:strLit>
-              <c:ptCount val="6"/>
-              <c:pt idx="0">
-                <c:v>Q1</c:v>
-              </c:pt>
-              <c:pt idx="1">
-                <c:v>Q2</c:v>
-              </c:pt>
-              <c:pt idx="2">
-                <c:v>Q3</c:v>
-              </c:pt>
-              <c:pt idx="3">
-                <c:v>Q4</c:v>
-              </c:pt>
-              <c:pt idx="4">
-                <c:v>Q5</c:v>
-              </c:pt>
-              <c:pt idx="5">
-                <c:v>Q6</c:v>
-              </c:pt>
-            </c:strLit>
-          </c:cat>
-          <c:val>
-            <c:numLit>
-              <c:formatCode>General</c:formatCode>
-              <c:ptCount val="6"/>
-              <c:pt idx="0">
-                <c:v>34</c:v>
-              </c:pt>
-              <c:pt idx="1">
-                <c:v>39</c:v>
-              </c:pt>
-              <c:pt idx="2">
-                <c:v>41</c:v>
-              </c:pt>
-              <c:pt idx="3">
-                <c:v>45</c:v>
-              </c:pt>
-              <c:pt idx="4">
-                <c:v>49</c:v>
-              </c:pt>
-              <c:pt idx="5">
-                <c:v>52</c:v>
-              </c:pt>
-            </c:numLit>
-          </c:val>
-        </c:ser>
-        <c:axId val="1"/>
-        <c:axId val="2"/>
-      </c:barChart>
-      <c:catAx>
-        <c:axId val="1"/>
-        <c:scaling>
-          <c:orientation val="minMax"/>
-        </c:scaling>
-        <c:axPos val="b"/>
-        <c:crossAx val="2"/>
-      </c:catAx>
-      <c:valAx>
-        <c:axId val="2"/>
-        <c:scaling>
-          <c:orientation val="minMax"/>
-        </c:scaling>
-        <c:axPos val="l"/>
-        <c:crossAx val="1"/>
-      </c:valAx>
-    </c:plotArea>
-    <c:legend>
-      <c:legendPos val="r"/>
-      <c:layout/>
-    </c:legend>
-    <c:plotVisOnly val="1"/>
-  </c:chart>
-</c:chartSpace>
-</file>
-
-<file path=ppt/slides/charts/chart2.xml><?xml version="1.0" encoding="utf-8"?>
-<c:chartSpace xmlns:c="http://schemas.openxmlformats.org/drawingml/2006/chart" xmlns:a="http://schemas.openxmlformats.org/drawingml/2006/main">
-  <c:chart>
-    <c:title>
-      <c:tx>
-        <c:rich>
-          <a:bodyPr/>
-          <a:lstStyle/>
-          <a:p>
-            <a:r>
-              <a:t>Driver trend</a:t>
-            </a:r>
-          </a:p>
-        </c:rich>
-      </c:tx>
-      <c:layout/>
-    </c:title>
-    <c:plotArea>
-      <c:layout/>
-      <c:lineChart>
-        <c:grouping val="standard"/>
-        <c:ser>
-          <c:idx val="0"/>
-          <c:order val="0"/>
-          <c:tx>
-            <c:v>Driver</c:v>
-          </c:tx>
-          <c:spPr>
-            <a:solidFill>
-              <a:srgbClr val="8CDC76"/>
-            </a:solidFill>
-            <a:ln w="38100">
-              <a:solidFill>
-                <a:srgbClr val="8CDC76"/>
-              </a:solidFill>
-              <a:prstDash val="solid"/>
-            </a:ln>
-          </c:spPr>
-          <c:marker>
-            <c:symbol val="circle"/>
-            <c:size val="6"/>
-          </c:marker>
-          <c:cat>
-            <c:strLit>
-              <c:ptCount val="6"/>
-              <c:pt idx="0">
-                <c:v>Q1</c:v>
-              </c:pt>
-              <c:pt idx="1">
-                <c:v>Q2</c:v>
-              </c:pt>
-              <c:pt idx="2">
-                <c:v>Q3</c:v>
-              </c:pt>
-              <c:pt idx="3">
-                <c:v>Q4</c:v>
-              </c:pt>
-              <c:pt idx="4">
-                <c:v>Q5</c:v>
-              </c:pt>
-              <c:pt idx="5">
-                <c:v>Q6</c:v>
-              </c:pt>
-            </c:strLit>
-          </c:cat>
-          <c:val>
-            <c:numLit>
-              <c:formatCode>General</c:formatCode>
-              <c:ptCount val="6"/>
-              <c:pt idx="0">
-                <c:v>22</c:v>
-              </c:pt>
-              <c:pt idx="1">
-                <c:v>28</c:v>
-              </c:pt>
-              <c:pt idx="2">
-                <c:v>34</c:v>
-              </c:pt>
-              <c:pt idx="3">
-                <c:v>39</c:v>
-              </c:pt>
-              <c:pt idx="4">
-                <c:v>45</c:v>
-              </c:pt>
-              <c:pt idx="5">
-                <c:v>51</c:v>
-              </c:pt>
-            </c:numLit>
-          </c:val>
-        </c:ser>
-        <c:axId val="1"/>
-        <c:axId val="2"/>
-      </c:lineChart>
-      <c:catAx>
-        <c:axId val="1"/>
-        <c:scaling>
-          <c:orientation val="minMax"/>
-        </c:scaling>
-        <c:axPos val="b"/>
-        <c:crossAx val="2"/>
-      </c:catAx>
-      <c:valAx>
-        <c:axId val="2"/>
-        <c:scaling>
-          <c:orientation val="minMax"/>
-        </c:scaling>
-        <c:axPos val="l"/>
-        <c:crossAx val="1"/>
-      </c:valAx>
-    </c:plotArea>
-    <c:plotVisOnly val="1"/>
-  </c:chart>
-</c:chartSpace>
-</file>
-
 <file path=ppt/slides/slide1.xml><?xml version="1.0" encoding="utf-8"?>
 <p:sld xmlns:p="http://schemas.openxmlformats.org/presentationml/2006/main">
   <p:cSld name="Opening claim">
     <p:bg>
       <p:bgPr>
         <a:blipFill xmlns:a="http://schemas.openxmlformats.org/drawingml/2006/main">
-          <a:blip xmlns:r="http://schemas.openxmlformats.org/officeDocument/2006/relationships" r:embed="rIdOfficeKitImage283e3eeb8530a9d2_1"/>
+          <a:blip xmlns:r="http://schemas.openxmlformats.org/officeDocument/2006/relationships" r:embed="rIdOfficeKitImage0d3bd4b5ccdd7cbb_1"/>
           <a:stretch>
             <a:fillRect/>
           </a:stretch>
@@ -1897,7 +1613,7 @@
           <p:nvPr/>
         </p:nvPicPr>
         <p:blipFill>
-          <a:blip xmlns:r="http://schemas.openxmlformats.org/officeDocument/2006/relationships" xmlns:a="http://schemas.openxmlformats.org/drawingml/2006/main" r:embed="rIdOfficeKitImageb7d7d39d00e5a7e4_1"/>
+          <a:blip xmlns:r="http://schemas.openxmlformats.org/officeDocument/2006/relationships" xmlns:a="http://schemas.openxmlformats.org/drawingml/2006/main" r:embed="rIdOfficeKitImage99c9affacaac8e72_1"/>
           <a:srcRect xmlns:a="http://schemas.openxmlformats.org/drawingml/2006/main" l="0" t="47256" r="0" b="47256"/>
           <a:stretch xmlns:a="http://schemas.openxmlformats.org/drawingml/2006/main">
             <a:fillRect/>
@@ -3458,7 +3174,7 @@
           <p:nvPr/>
         </p:nvPicPr>
         <p:blipFill>
-          <a:blip xmlns:r="http://schemas.openxmlformats.org/officeDocument/2006/relationships" xmlns:a="http://schemas.openxmlformats.org/drawingml/2006/main" r:embed="rIdOfficeKitImage083106afebc7d419_1"/>
+          <a:blip xmlns:r="http://schemas.openxmlformats.org/officeDocument/2006/relationships" xmlns:a="http://schemas.openxmlformats.org/drawingml/2006/main" r:embed="rIdOfficeKitImage10e4539a68783891_1"/>
           <a:srcRect xmlns:a="http://schemas.openxmlformats.org/drawingml/2006/main" l="0" t="47258" r="0" b="47258"/>
           <a:stretch xmlns:a="http://schemas.openxmlformats.org/drawingml/2006/main">
             <a:fillRect/>
@@ -3657,52 +3373,53 @@
           </a:p>
         </p:txBody>
       </p:sp>
-      <p:graphicFrame>
-        <p:nvGraphicFramePr>
-          <p:cNvPr id="20" name="dense-primary-chart"/>
-          <p:cNvGraphicFramePr>
-            <a:graphicFrameLocks xmlns:a="http://schemas.openxmlformats.org/drawingml/2006/main" noGrp="1"/>
-          </p:cNvGraphicFramePr>
-          <p:nvPr/>
-        </p:nvGraphicFramePr>
-        <p:xfrm>
-          <a:off xmlns:a="http://schemas.openxmlformats.org/drawingml/2006/main" x="990600" y="3048000"/>
-          <a:ext xmlns:a="http://schemas.openxmlformats.org/drawingml/2006/main" cx="6286500" cy="2952750"/>
-        </p:xfrm>
-        <a:graphic xmlns:a="http://schemas.openxmlformats.org/drawingml/2006/main">
-          <a:graphicData uri="http://schemas.openxmlformats.org/drawingml/2006/chart">
-            <c:chart xmlns:r="http://schemas.openxmlformats.org/officeDocument/2006/relationships" xmlns:c="http://schemas.openxmlformats.org/drawingml/2006/chart" r:id="Rff687443849348f4"/>
-          </a:graphicData>
-        </a:graphic>
-      </p:graphicFrame>
-      <p:graphicFrame>
-        <p:nvGraphicFramePr>
-          <p:cNvPr id="21" name="dense-secondary-chart"/>
-          <p:cNvGraphicFramePr>
-            <a:graphicFrameLocks xmlns:a="http://schemas.openxmlformats.org/drawingml/2006/main" noGrp="1"/>
-          </p:cNvGraphicFramePr>
-          <p:nvPr/>
-        </p:nvGraphicFramePr>
-        <p:xfrm>
-          <a:off xmlns:a="http://schemas.openxmlformats.org/drawingml/2006/main" x="7658100" y="3048000"/>
-          <a:ext xmlns:a="http://schemas.openxmlformats.org/drawingml/2006/main" cx="3143250" cy="2952750"/>
-        </p:xfrm>
-        <a:graphic xmlns:a="http://schemas.openxmlformats.org/drawingml/2006/main">
-          <a:graphicData uri="http://schemas.openxmlformats.org/drawingml/2006/chart">
-            <c:chart xmlns:r="http://schemas.openxmlformats.org/officeDocument/2006/relationships" xmlns:c="http://schemas.openxmlformats.org/drawingml/2006/chart" r:id="Reb1c1d2fc9064792"/>
-          </a:graphicData>
-        </a:graphic>
-      </p:graphicFrame>
-      <p:sp>
-        <p:nvSpPr>
-          <p:cNvPr id="22" name="dense-read-rule"/>
-          <p:cNvSpPr/>
-          <p:nvPr/>
-        </p:nvSpPr>
-        <p:spPr>
-          <a:xfrm xmlns:a="http://schemas.openxmlformats.org/drawingml/2006/main">
-            <a:off x="11315700" y="3314700"/>
-            <a:ext cx="2686050" cy="0"/>
+      <p:sp>
+        <p:nvSpPr>
+          <p:cNvPr id="20" name="timeline-label"/>
+          <p:cNvSpPr txBox="1"/>
+          <p:nvPr/>
+        </p:nvSpPr>
+        <p:spPr>
+          <a:xfrm xmlns:a="http://schemas.openxmlformats.org/drawingml/2006/main">
+            <a:off x="1066800" y="3238500"/>
+            <a:ext cx="4000500" cy="228600"/>
+          </a:xfrm>
+          <a:prstGeom xmlns:a="http://schemas.openxmlformats.org/drawingml/2006/main" prst="rect">
+            <a:avLst/>
+          </a:prstGeom>
+          <a:noFill xmlns:a="http://schemas.openxmlformats.org/drawingml/2006/main"/>
+          <a:ln xmlns:a="http://schemas.openxmlformats.org/drawingml/2006/main" w="0">
+            <a:noFill/>
+          </a:ln>
+        </p:spPr>
+        <p:txBody>
+          <a:bodyPr xmlns:a="http://schemas.openxmlformats.org/drawingml/2006/main" wrap="square" lIns="0" tIns="0" rIns="0" bIns="0" anchor="t"/>
+          <a:lstStyle xmlns:a="http://schemas.openxmlformats.org/drawingml/2006/main"/>
+          <a:p xmlns:a="http://schemas.openxmlformats.org/drawingml/2006/main">
+            <a:r>
+              <a:rPr lang="en-US" sz="1125" b="1">
+                <a:solidFill>
+                  <a:srgbClr val="2E8C5C"/>
+                </a:solidFill>
+                <a:latin typeface="Arial"/>
+                <a:ea typeface="Arial"/>
+              </a:rPr>
+              <a:t>EVOLUTION / TRANSITION</a:t>
+            </a:r>
+            <a:endParaRPr lang="en-US"/>
+          </a:p>
+        </p:txBody>
+      </p:sp>
+      <p:sp>
+        <p:nvSpPr>
+          <p:cNvPr id="21" name="timeline-axis"/>
+          <p:cNvSpPr/>
+          <p:nvPr/>
+        </p:nvSpPr>
+        <p:spPr>
+          <a:xfrm xmlns:a="http://schemas.openxmlformats.org/drawingml/2006/main">
+            <a:off x="1219200" y="4762500"/>
+            <a:ext cx="10287000" cy="0"/>
           </a:xfrm>
           <a:prstGeom xmlns:a="http://schemas.openxmlformats.org/drawingml/2006/main" prst="line">
             <a:avLst/>
@@ -3710,6 +3427,642 @@
           <a:noFill xmlns:a="http://schemas.openxmlformats.org/drawingml/2006/main"/>
           <a:ln xmlns:a="http://schemas.openxmlformats.org/drawingml/2006/main" w="38100">
             <a:solidFill>
+              <a:srgbClr val="8B9D94"/>
+            </a:solidFill>
+            <a:prstDash val="solid"/>
+          </a:ln>
+        </p:spPr>
+        <p:txBody>
+          <a:bodyPr xmlns:a="http://schemas.openxmlformats.org/drawingml/2006/main" wrap="square" lIns="0" tIns="0" rIns="0" bIns="0" anchor="t"/>
+          <a:lstStyle xmlns:a="http://schemas.openxmlformats.org/drawingml/2006/main"/>
+          <a:p xmlns:a="http://schemas.openxmlformats.org/drawingml/2006/main">
+            <a:r>
+              <a:rPr lang="en-US"/>
+              <a:t/>
+            </a:r>
+            <a:endParaRPr lang="en-US"/>
+          </a:p>
+        </p:txBody>
+      </p:sp>
+      <p:sp>
+        <p:nvSpPr>
+          <p:cNvPr id="22" name="timeline-node-0"/>
+          <p:cNvSpPr/>
+          <p:nvPr/>
+        </p:nvSpPr>
+        <p:spPr>
+          <a:xfrm xmlns:a="http://schemas.openxmlformats.org/drawingml/2006/main">
+            <a:off x="1066800" y="4610100"/>
+            <a:ext cx="304800" cy="304800"/>
+          </a:xfrm>
+          <a:prstGeom xmlns:a="http://schemas.openxmlformats.org/drawingml/2006/main" prst="ellipse">
+            <a:avLst/>
+          </a:prstGeom>
+          <a:solidFill xmlns:a="http://schemas.openxmlformats.org/drawingml/2006/main">
+            <a:srgbClr val="F6F8F5"/>
+          </a:solidFill>
+          <a:ln xmlns:a="http://schemas.openxmlformats.org/drawingml/2006/main" w="25400">
+            <a:solidFill>
+              <a:srgbClr val="183A2A"/>
+            </a:solidFill>
+            <a:prstDash val="solid"/>
+          </a:ln>
+        </p:spPr>
+        <p:txBody>
+          <a:bodyPr xmlns:a="http://schemas.openxmlformats.org/drawingml/2006/main" wrap="square" lIns="0" tIns="0" rIns="0" bIns="0" anchor="t"/>
+          <a:lstStyle xmlns:a="http://schemas.openxmlformats.org/drawingml/2006/main"/>
+          <a:p xmlns:a="http://schemas.openxmlformats.org/drawingml/2006/main">
+            <a:r>
+              <a:rPr lang="en-US"/>
+              <a:t/>
+            </a:r>
+            <a:endParaRPr lang="en-US"/>
+          </a:p>
+        </p:txBody>
+      </p:sp>
+      <p:sp>
+        <p:nvSpPr>
+          <p:cNvPr id="23" name="timeline-number-0"/>
+          <p:cNvSpPr txBox="1"/>
+          <p:nvPr/>
+        </p:nvSpPr>
+        <p:spPr>
+          <a:xfrm xmlns:a="http://schemas.openxmlformats.org/drawingml/2006/main">
+            <a:off x="952500" y="4076700"/>
+            <a:ext cx="533400" cy="190500"/>
+          </a:xfrm>
+          <a:prstGeom xmlns:a="http://schemas.openxmlformats.org/drawingml/2006/main" prst="rect">
+            <a:avLst/>
+          </a:prstGeom>
+          <a:noFill xmlns:a="http://schemas.openxmlformats.org/drawingml/2006/main"/>
+          <a:ln xmlns:a="http://schemas.openxmlformats.org/drawingml/2006/main" w="0">
+            <a:noFill/>
+          </a:ln>
+        </p:spPr>
+        <p:txBody>
+          <a:bodyPr xmlns:a="http://schemas.openxmlformats.org/drawingml/2006/main" wrap="square" lIns="0" tIns="0" rIns="0" bIns="0" anchor="t"/>
+          <a:lstStyle xmlns:a="http://schemas.openxmlformats.org/drawingml/2006/main"/>
+          <a:p xmlns:a="http://schemas.openxmlformats.org/drawingml/2006/main">
+            <a:pPr algn="ctr"/>
+            <a:r>
+              <a:rPr lang="en-US" sz="975" b="1">
+                <a:solidFill>
+                  <a:srgbClr val="2E8C5C"/>
+                </a:solidFill>
+                <a:latin typeface="Arial"/>
+                <a:ea typeface="Arial"/>
+              </a:rPr>
+              <a:t>01</a:t>
+            </a:r>
+            <a:endParaRPr lang="en-US"/>
+          </a:p>
+        </p:txBody>
+      </p:sp>
+      <p:sp>
+        <p:nvSpPr>
+          <p:cNvPr id="24" name="timeline-label-0"/>
+          <p:cNvSpPr txBox="1"/>
+          <p:nvPr/>
+        </p:nvSpPr>
+        <p:spPr>
+          <a:xfrm xmlns:a="http://schemas.openxmlformats.org/drawingml/2006/main">
+            <a:off x="533400" y="5086350"/>
+            <a:ext cx="1371600" cy="228600"/>
+          </a:xfrm>
+          <a:prstGeom xmlns:a="http://schemas.openxmlformats.org/drawingml/2006/main" prst="rect">
+            <a:avLst/>
+          </a:prstGeom>
+          <a:noFill xmlns:a="http://schemas.openxmlformats.org/drawingml/2006/main"/>
+          <a:ln xmlns:a="http://schemas.openxmlformats.org/drawingml/2006/main" w="0">
+            <a:noFill/>
+          </a:ln>
+        </p:spPr>
+        <p:txBody>
+          <a:bodyPr xmlns:a="http://schemas.openxmlformats.org/drawingml/2006/main" wrap="square" lIns="0" tIns="0" rIns="0" bIns="0" anchor="t"/>
+          <a:lstStyle xmlns:a="http://schemas.openxmlformats.org/drawingml/2006/main"/>
+          <a:p xmlns:a="http://schemas.openxmlformats.org/drawingml/2006/main">
+            <a:pPr algn="ctr"/>
+            <a:r>
+              <a:rPr lang="en-US" sz="1350" b="1">
+                <a:solidFill>
+                  <a:srgbClr val="183A2A"/>
+                </a:solidFill>
+                <a:latin typeface="Arial"/>
+                <a:ea typeface="Arial"/>
+              </a:rPr>
+              <a:t>Frame</a:t>
+            </a:r>
+            <a:endParaRPr lang="en-US"/>
+          </a:p>
+        </p:txBody>
+      </p:sp>
+      <p:sp>
+        <p:nvSpPr>
+          <p:cNvPr id="25" name="timeline-text-0"/>
+          <p:cNvSpPr txBox="1"/>
+          <p:nvPr/>
+        </p:nvSpPr>
+        <p:spPr>
+          <a:xfrm xmlns:a="http://schemas.openxmlformats.org/drawingml/2006/main">
+            <a:off x="323850" y="5391150"/>
+            <a:ext cx="1790700" cy="361950"/>
+          </a:xfrm>
+          <a:prstGeom xmlns:a="http://schemas.openxmlformats.org/drawingml/2006/main" prst="rect">
+            <a:avLst/>
+          </a:prstGeom>
+          <a:noFill xmlns:a="http://schemas.openxmlformats.org/drawingml/2006/main"/>
+          <a:ln xmlns:a="http://schemas.openxmlformats.org/drawingml/2006/main" w="0">
+            <a:noFill/>
+          </a:ln>
+        </p:spPr>
+        <p:txBody>
+          <a:bodyPr xmlns:a="http://schemas.openxmlformats.org/drawingml/2006/main" wrap="square" lIns="0" tIns="0" rIns="0" bIns="0" anchor="t"/>
+          <a:lstStyle xmlns:a="http://schemas.openxmlformats.org/drawingml/2006/main"/>
+          <a:p xmlns:a="http://schemas.openxmlformats.org/drawingml/2006/main">
+            <a:pPr algn="ctr"/>
+            <a:r>
+              <a:rPr lang="en-US" sz="1050">
+                <a:solidFill>
+                  <a:srgbClr val="8B9D94"/>
+                </a:solidFill>
+                <a:latin typeface="Arial"/>
+                <a:ea typeface="Arial"/>
+              </a:rPr>
+              <a:t>Name the question</a:t>
+            </a:r>
+            <a:endParaRPr lang="en-US"/>
+          </a:p>
+        </p:txBody>
+      </p:sp>
+      <p:sp>
+        <p:nvSpPr>
+          <p:cNvPr id="26" name="timeline-node-1"/>
+          <p:cNvSpPr/>
+          <p:nvPr/>
+        </p:nvSpPr>
+        <p:spPr>
+          <a:xfrm xmlns:a="http://schemas.openxmlformats.org/drawingml/2006/main">
+            <a:off x="3638550" y="4610100"/>
+            <a:ext cx="304800" cy="304800"/>
+          </a:xfrm>
+          <a:prstGeom xmlns:a="http://schemas.openxmlformats.org/drawingml/2006/main" prst="ellipse">
+            <a:avLst/>
+          </a:prstGeom>
+          <a:solidFill xmlns:a="http://schemas.openxmlformats.org/drawingml/2006/main">
+            <a:srgbClr val="F6F8F5"/>
+          </a:solidFill>
+          <a:ln xmlns:a="http://schemas.openxmlformats.org/drawingml/2006/main" w="25400">
+            <a:solidFill>
+              <a:srgbClr val="183A2A"/>
+            </a:solidFill>
+            <a:prstDash val="solid"/>
+          </a:ln>
+        </p:spPr>
+        <p:txBody>
+          <a:bodyPr xmlns:a="http://schemas.openxmlformats.org/drawingml/2006/main" wrap="square" lIns="0" tIns="0" rIns="0" bIns="0" anchor="t"/>
+          <a:lstStyle xmlns:a="http://schemas.openxmlformats.org/drawingml/2006/main"/>
+          <a:p xmlns:a="http://schemas.openxmlformats.org/drawingml/2006/main">
+            <a:r>
+              <a:rPr lang="en-US"/>
+              <a:t/>
+            </a:r>
+            <a:endParaRPr lang="en-US"/>
+          </a:p>
+        </p:txBody>
+      </p:sp>
+      <p:sp>
+        <p:nvSpPr>
+          <p:cNvPr id="27" name="timeline-number-1"/>
+          <p:cNvSpPr txBox="1"/>
+          <p:nvPr/>
+        </p:nvSpPr>
+        <p:spPr>
+          <a:xfrm xmlns:a="http://schemas.openxmlformats.org/drawingml/2006/main">
+            <a:off x="3524250" y="4076700"/>
+            <a:ext cx="533400" cy="190500"/>
+          </a:xfrm>
+          <a:prstGeom xmlns:a="http://schemas.openxmlformats.org/drawingml/2006/main" prst="rect">
+            <a:avLst/>
+          </a:prstGeom>
+          <a:noFill xmlns:a="http://schemas.openxmlformats.org/drawingml/2006/main"/>
+          <a:ln xmlns:a="http://schemas.openxmlformats.org/drawingml/2006/main" w="0">
+            <a:noFill/>
+          </a:ln>
+        </p:spPr>
+        <p:txBody>
+          <a:bodyPr xmlns:a="http://schemas.openxmlformats.org/drawingml/2006/main" wrap="square" lIns="0" tIns="0" rIns="0" bIns="0" anchor="t"/>
+          <a:lstStyle xmlns:a="http://schemas.openxmlformats.org/drawingml/2006/main"/>
+          <a:p xmlns:a="http://schemas.openxmlformats.org/drawingml/2006/main">
+            <a:pPr algn="ctr"/>
+            <a:r>
+              <a:rPr lang="en-US" sz="975" b="1">
+                <a:solidFill>
+                  <a:srgbClr val="2E8C5C"/>
+                </a:solidFill>
+                <a:latin typeface="Arial"/>
+                <a:ea typeface="Arial"/>
+              </a:rPr>
+              <a:t>02</a:t>
+            </a:r>
+            <a:endParaRPr lang="en-US"/>
+          </a:p>
+        </p:txBody>
+      </p:sp>
+      <p:sp>
+        <p:nvSpPr>
+          <p:cNvPr id="28" name="timeline-label-1"/>
+          <p:cNvSpPr txBox="1"/>
+          <p:nvPr/>
+        </p:nvSpPr>
+        <p:spPr>
+          <a:xfrm xmlns:a="http://schemas.openxmlformats.org/drawingml/2006/main">
+            <a:off x="3105150" y="5086350"/>
+            <a:ext cx="1371600" cy="228600"/>
+          </a:xfrm>
+          <a:prstGeom xmlns:a="http://schemas.openxmlformats.org/drawingml/2006/main" prst="rect">
+            <a:avLst/>
+          </a:prstGeom>
+          <a:noFill xmlns:a="http://schemas.openxmlformats.org/drawingml/2006/main"/>
+          <a:ln xmlns:a="http://schemas.openxmlformats.org/drawingml/2006/main" w="0">
+            <a:noFill/>
+          </a:ln>
+        </p:spPr>
+        <p:txBody>
+          <a:bodyPr xmlns:a="http://schemas.openxmlformats.org/drawingml/2006/main" wrap="square" lIns="0" tIns="0" rIns="0" bIns="0" anchor="t"/>
+          <a:lstStyle xmlns:a="http://schemas.openxmlformats.org/drawingml/2006/main"/>
+          <a:p xmlns:a="http://schemas.openxmlformats.org/drawingml/2006/main">
+            <a:pPr algn="ctr"/>
+            <a:r>
+              <a:rPr lang="en-US" sz="1350" b="1">
+                <a:solidFill>
+                  <a:srgbClr val="183A2A"/>
+                </a:solidFill>
+                <a:latin typeface="Arial"/>
+                <a:ea typeface="Arial"/>
+              </a:rPr>
+              <a:t>Test</a:t>
+            </a:r>
+            <a:endParaRPr lang="en-US"/>
+          </a:p>
+        </p:txBody>
+      </p:sp>
+      <p:sp>
+        <p:nvSpPr>
+          <p:cNvPr id="29" name="timeline-text-1"/>
+          <p:cNvSpPr txBox="1"/>
+          <p:nvPr/>
+        </p:nvSpPr>
+        <p:spPr>
+          <a:xfrm xmlns:a="http://schemas.openxmlformats.org/drawingml/2006/main">
+            <a:off x="2895600" y="5391150"/>
+            <a:ext cx="1790700" cy="361950"/>
+          </a:xfrm>
+          <a:prstGeom xmlns:a="http://schemas.openxmlformats.org/drawingml/2006/main" prst="rect">
+            <a:avLst/>
+          </a:prstGeom>
+          <a:noFill xmlns:a="http://schemas.openxmlformats.org/drawingml/2006/main"/>
+          <a:ln xmlns:a="http://schemas.openxmlformats.org/drawingml/2006/main" w="0">
+            <a:noFill/>
+          </a:ln>
+        </p:spPr>
+        <p:txBody>
+          <a:bodyPr xmlns:a="http://schemas.openxmlformats.org/drawingml/2006/main" wrap="square" lIns="0" tIns="0" rIns="0" bIns="0" anchor="t"/>
+          <a:lstStyle xmlns:a="http://schemas.openxmlformats.org/drawingml/2006/main"/>
+          <a:p xmlns:a="http://schemas.openxmlformats.org/drawingml/2006/main">
+            <a:pPr algn="ctr"/>
+            <a:r>
+              <a:rPr lang="en-US" sz="1050">
+                <a:solidFill>
+                  <a:srgbClr val="8B9D94"/>
+                </a:solidFill>
+                <a:latin typeface="Arial"/>
+                <a:ea typeface="Arial"/>
+              </a:rPr>
+              <a:t>Hold the rule</a:t>
+            </a:r>
+            <a:endParaRPr lang="en-US"/>
+          </a:p>
+        </p:txBody>
+      </p:sp>
+      <p:sp>
+        <p:nvSpPr>
+          <p:cNvPr id="30" name="timeline-node-2"/>
+          <p:cNvSpPr/>
+          <p:nvPr/>
+        </p:nvSpPr>
+        <p:spPr>
+          <a:xfrm xmlns:a="http://schemas.openxmlformats.org/drawingml/2006/main">
+            <a:off x="6210300" y="4610100"/>
+            <a:ext cx="304800" cy="304800"/>
+          </a:xfrm>
+          <a:prstGeom xmlns:a="http://schemas.openxmlformats.org/drawingml/2006/main" prst="ellipse">
+            <a:avLst/>
+          </a:prstGeom>
+          <a:solidFill xmlns:a="http://schemas.openxmlformats.org/drawingml/2006/main">
+            <a:srgbClr val="F6F8F5"/>
+          </a:solidFill>
+          <a:ln xmlns:a="http://schemas.openxmlformats.org/drawingml/2006/main" w="25400">
+            <a:solidFill>
+              <a:srgbClr val="183A2A"/>
+            </a:solidFill>
+            <a:prstDash val="solid"/>
+          </a:ln>
+        </p:spPr>
+        <p:txBody>
+          <a:bodyPr xmlns:a="http://schemas.openxmlformats.org/drawingml/2006/main" wrap="square" lIns="0" tIns="0" rIns="0" bIns="0" anchor="t"/>
+          <a:lstStyle xmlns:a="http://schemas.openxmlformats.org/drawingml/2006/main"/>
+          <a:p xmlns:a="http://schemas.openxmlformats.org/drawingml/2006/main">
+            <a:r>
+              <a:rPr lang="en-US"/>
+              <a:t/>
+            </a:r>
+            <a:endParaRPr lang="en-US"/>
+          </a:p>
+        </p:txBody>
+      </p:sp>
+      <p:sp>
+        <p:nvSpPr>
+          <p:cNvPr id="31" name="timeline-number-2"/>
+          <p:cNvSpPr txBox="1"/>
+          <p:nvPr/>
+        </p:nvSpPr>
+        <p:spPr>
+          <a:xfrm xmlns:a="http://schemas.openxmlformats.org/drawingml/2006/main">
+            <a:off x="6096000" y="4076700"/>
+            <a:ext cx="533400" cy="190500"/>
+          </a:xfrm>
+          <a:prstGeom xmlns:a="http://schemas.openxmlformats.org/drawingml/2006/main" prst="rect">
+            <a:avLst/>
+          </a:prstGeom>
+          <a:noFill xmlns:a="http://schemas.openxmlformats.org/drawingml/2006/main"/>
+          <a:ln xmlns:a="http://schemas.openxmlformats.org/drawingml/2006/main" w="0">
+            <a:noFill/>
+          </a:ln>
+        </p:spPr>
+        <p:txBody>
+          <a:bodyPr xmlns:a="http://schemas.openxmlformats.org/drawingml/2006/main" wrap="square" lIns="0" tIns="0" rIns="0" bIns="0" anchor="t"/>
+          <a:lstStyle xmlns:a="http://schemas.openxmlformats.org/drawingml/2006/main"/>
+          <a:p xmlns:a="http://schemas.openxmlformats.org/drawingml/2006/main">
+            <a:pPr algn="ctr"/>
+            <a:r>
+              <a:rPr lang="en-US" sz="975" b="1">
+                <a:solidFill>
+                  <a:srgbClr val="2E8C5C"/>
+                </a:solidFill>
+                <a:latin typeface="Arial"/>
+                <a:ea typeface="Arial"/>
+              </a:rPr>
+              <a:t>03</a:t>
+            </a:r>
+            <a:endParaRPr lang="en-US"/>
+          </a:p>
+        </p:txBody>
+      </p:sp>
+      <p:sp>
+        <p:nvSpPr>
+          <p:cNvPr id="32" name="timeline-label-2"/>
+          <p:cNvSpPr txBox="1"/>
+          <p:nvPr/>
+        </p:nvSpPr>
+        <p:spPr>
+          <a:xfrm xmlns:a="http://schemas.openxmlformats.org/drawingml/2006/main">
+            <a:off x="5676900" y="5086350"/>
+            <a:ext cx="1371600" cy="228600"/>
+          </a:xfrm>
+          <a:prstGeom xmlns:a="http://schemas.openxmlformats.org/drawingml/2006/main" prst="rect">
+            <a:avLst/>
+          </a:prstGeom>
+          <a:noFill xmlns:a="http://schemas.openxmlformats.org/drawingml/2006/main"/>
+          <a:ln xmlns:a="http://schemas.openxmlformats.org/drawingml/2006/main" w="0">
+            <a:noFill/>
+          </a:ln>
+        </p:spPr>
+        <p:txBody>
+          <a:bodyPr xmlns:a="http://schemas.openxmlformats.org/drawingml/2006/main" wrap="square" lIns="0" tIns="0" rIns="0" bIns="0" anchor="t"/>
+          <a:lstStyle xmlns:a="http://schemas.openxmlformats.org/drawingml/2006/main"/>
+          <a:p xmlns:a="http://schemas.openxmlformats.org/drawingml/2006/main">
+            <a:pPr algn="ctr"/>
+            <a:r>
+              <a:rPr lang="en-US" sz="1350" b="1">
+                <a:solidFill>
+                  <a:srgbClr val="183A2A"/>
+                </a:solidFill>
+                <a:latin typeface="Arial"/>
+                <a:ea typeface="Arial"/>
+              </a:rPr>
+              <a:t>Read</a:t>
+            </a:r>
+            <a:endParaRPr lang="en-US"/>
+          </a:p>
+        </p:txBody>
+      </p:sp>
+      <p:sp>
+        <p:nvSpPr>
+          <p:cNvPr id="33" name="timeline-text-2"/>
+          <p:cNvSpPr txBox="1"/>
+          <p:nvPr/>
+        </p:nvSpPr>
+        <p:spPr>
+          <a:xfrm xmlns:a="http://schemas.openxmlformats.org/drawingml/2006/main">
+            <a:off x="5467350" y="5391150"/>
+            <a:ext cx="1790700" cy="361950"/>
+          </a:xfrm>
+          <a:prstGeom xmlns:a="http://schemas.openxmlformats.org/drawingml/2006/main" prst="rect">
+            <a:avLst/>
+          </a:prstGeom>
+          <a:noFill xmlns:a="http://schemas.openxmlformats.org/drawingml/2006/main"/>
+          <a:ln xmlns:a="http://schemas.openxmlformats.org/drawingml/2006/main" w="0">
+            <a:noFill/>
+          </a:ln>
+        </p:spPr>
+        <p:txBody>
+          <a:bodyPr xmlns:a="http://schemas.openxmlformats.org/drawingml/2006/main" wrap="square" lIns="0" tIns="0" rIns="0" bIns="0" anchor="t"/>
+          <a:lstStyle xmlns:a="http://schemas.openxmlformats.org/drawingml/2006/main"/>
+          <a:p xmlns:a="http://schemas.openxmlformats.org/drawingml/2006/main">
+            <a:pPr algn="ctr"/>
+            <a:r>
+              <a:rPr lang="en-US" sz="1050">
+                <a:solidFill>
+                  <a:srgbClr val="8B9D94"/>
+                </a:solidFill>
+                <a:latin typeface="Arial"/>
+                <a:ea typeface="Arial"/>
+              </a:rPr>
+              <a:t>Separate signal</a:t>
+            </a:r>
+            <a:endParaRPr lang="en-US"/>
+          </a:p>
+        </p:txBody>
+      </p:sp>
+      <p:sp>
+        <p:nvSpPr>
+          <p:cNvPr id="34" name="timeline-node-3"/>
+          <p:cNvSpPr/>
+          <p:nvPr/>
+        </p:nvSpPr>
+        <p:spPr>
+          <a:xfrm xmlns:a="http://schemas.openxmlformats.org/drawingml/2006/main">
+            <a:off x="8782050" y="4610100"/>
+            <a:ext cx="304800" cy="304800"/>
+          </a:xfrm>
+          <a:prstGeom xmlns:a="http://schemas.openxmlformats.org/drawingml/2006/main" prst="ellipse">
+            <a:avLst/>
+          </a:prstGeom>
+          <a:solidFill xmlns:a="http://schemas.openxmlformats.org/drawingml/2006/main">
+            <a:srgbClr val="F6F8F5"/>
+          </a:solidFill>
+          <a:ln xmlns:a="http://schemas.openxmlformats.org/drawingml/2006/main" w="25400">
+            <a:solidFill>
+              <a:srgbClr val="183A2A"/>
+            </a:solidFill>
+            <a:prstDash val="solid"/>
+          </a:ln>
+        </p:spPr>
+        <p:txBody>
+          <a:bodyPr xmlns:a="http://schemas.openxmlformats.org/drawingml/2006/main" wrap="square" lIns="0" tIns="0" rIns="0" bIns="0" anchor="t"/>
+          <a:lstStyle xmlns:a="http://schemas.openxmlformats.org/drawingml/2006/main"/>
+          <a:p xmlns:a="http://schemas.openxmlformats.org/drawingml/2006/main">
+            <a:r>
+              <a:rPr lang="en-US"/>
+              <a:t/>
+            </a:r>
+            <a:endParaRPr lang="en-US"/>
+          </a:p>
+        </p:txBody>
+      </p:sp>
+      <p:sp>
+        <p:nvSpPr>
+          <p:cNvPr id="35" name="timeline-number-3"/>
+          <p:cNvSpPr txBox="1"/>
+          <p:nvPr/>
+        </p:nvSpPr>
+        <p:spPr>
+          <a:xfrm xmlns:a="http://schemas.openxmlformats.org/drawingml/2006/main">
+            <a:off x="8667750" y="4076700"/>
+            <a:ext cx="533400" cy="190500"/>
+          </a:xfrm>
+          <a:prstGeom xmlns:a="http://schemas.openxmlformats.org/drawingml/2006/main" prst="rect">
+            <a:avLst/>
+          </a:prstGeom>
+          <a:noFill xmlns:a="http://schemas.openxmlformats.org/drawingml/2006/main"/>
+          <a:ln xmlns:a="http://schemas.openxmlformats.org/drawingml/2006/main" w="0">
+            <a:noFill/>
+          </a:ln>
+        </p:spPr>
+        <p:txBody>
+          <a:bodyPr xmlns:a="http://schemas.openxmlformats.org/drawingml/2006/main" wrap="square" lIns="0" tIns="0" rIns="0" bIns="0" anchor="t"/>
+          <a:lstStyle xmlns:a="http://schemas.openxmlformats.org/drawingml/2006/main"/>
+          <a:p xmlns:a="http://schemas.openxmlformats.org/drawingml/2006/main">
+            <a:pPr algn="ctr"/>
+            <a:r>
+              <a:rPr lang="en-US" sz="975" b="1">
+                <a:solidFill>
+                  <a:srgbClr val="2E8C5C"/>
+                </a:solidFill>
+                <a:latin typeface="Arial"/>
+                <a:ea typeface="Arial"/>
+              </a:rPr>
+              <a:t>04</a:t>
+            </a:r>
+            <a:endParaRPr lang="en-US"/>
+          </a:p>
+        </p:txBody>
+      </p:sp>
+      <p:sp>
+        <p:nvSpPr>
+          <p:cNvPr id="36" name="timeline-label-3"/>
+          <p:cNvSpPr txBox="1"/>
+          <p:nvPr/>
+        </p:nvSpPr>
+        <p:spPr>
+          <a:xfrm xmlns:a="http://schemas.openxmlformats.org/drawingml/2006/main">
+            <a:off x="8248650" y="5086350"/>
+            <a:ext cx="1371600" cy="228600"/>
+          </a:xfrm>
+          <a:prstGeom xmlns:a="http://schemas.openxmlformats.org/drawingml/2006/main" prst="rect">
+            <a:avLst/>
+          </a:prstGeom>
+          <a:noFill xmlns:a="http://schemas.openxmlformats.org/drawingml/2006/main"/>
+          <a:ln xmlns:a="http://schemas.openxmlformats.org/drawingml/2006/main" w="0">
+            <a:noFill/>
+          </a:ln>
+        </p:spPr>
+        <p:txBody>
+          <a:bodyPr xmlns:a="http://schemas.openxmlformats.org/drawingml/2006/main" wrap="square" lIns="0" tIns="0" rIns="0" bIns="0" anchor="t"/>
+          <a:lstStyle xmlns:a="http://schemas.openxmlformats.org/drawingml/2006/main"/>
+          <a:p xmlns:a="http://schemas.openxmlformats.org/drawingml/2006/main">
+            <a:pPr algn="ctr"/>
+            <a:r>
+              <a:rPr lang="en-US" sz="1350" b="1">
+                <a:solidFill>
+                  <a:srgbClr val="183A2A"/>
+                </a:solidFill>
+                <a:latin typeface="Arial"/>
+                <a:ea typeface="Arial"/>
+              </a:rPr>
+              <a:t>Move</a:t>
+            </a:r>
+            <a:endParaRPr lang="en-US"/>
+          </a:p>
+        </p:txBody>
+      </p:sp>
+      <p:sp>
+        <p:nvSpPr>
+          <p:cNvPr id="37" name="timeline-text-3"/>
+          <p:cNvSpPr txBox="1"/>
+          <p:nvPr/>
+        </p:nvSpPr>
+        <p:spPr>
+          <a:xfrm xmlns:a="http://schemas.openxmlformats.org/drawingml/2006/main">
+            <a:off x="8039100" y="5391150"/>
+            <a:ext cx="1790700" cy="361950"/>
+          </a:xfrm>
+          <a:prstGeom xmlns:a="http://schemas.openxmlformats.org/drawingml/2006/main" prst="rect">
+            <a:avLst/>
+          </a:prstGeom>
+          <a:noFill xmlns:a="http://schemas.openxmlformats.org/drawingml/2006/main"/>
+          <a:ln xmlns:a="http://schemas.openxmlformats.org/drawingml/2006/main" w="0">
+            <a:noFill/>
+          </a:ln>
+        </p:spPr>
+        <p:txBody>
+          <a:bodyPr xmlns:a="http://schemas.openxmlformats.org/drawingml/2006/main" wrap="square" lIns="0" tIns="0" rIns="0" bIns="0" anchor="t"/>
+          <a:lstStyle xmlns:a="http://schemas.openxmlformats.org/drawingml/2006/main"/>
+          <a:p xmlns:a="http://schemas.openxmlformats.org/drawingml/2006/main">
+            <a:pPr algn="ctr"/>
+            <a:r>
+              <a:rPr lang="en-US" sz="1050">
+                <a:solidFill>
+                  <a:srgbClr val="8B9D94"/>
+                </a:solidFill>
+                <a:latin typeface="Arial"/>
+                <a:ea typeface="Arial"/>
+              </a:rPr>
+              <a:t>Set the next gate</a:t>
+            </a:r>
+            <a:endParaRPr lang="en-US"/>
+          </a:p>
+        </p:txBody>
+      </p:sp>
+      <p:sp>
+        <p:nvSpPr>
+          <p:cNvPr id="38" name="timeline-node-4"/>
+          <p:cNvSpPr/>
+          <p:nvPr/>
+        </p:nvSpPr>
+        <p:spPr>
+          <a:xfrm xmlns:a="http://schemas.openxmlformats.org/drawingml/2006/main">
+            <a:off x="11353800" y="4610100"/>
+            <a:ext cx="304800" cy="304800"/>
+          </a:xfrm>
+          <a:prstGeom xmlns:a="http://schemas.openxmlformats.org/drawingml/2006/main" prst="ellipse">
+            <a:avLst/>
+          </a:prstGeom>
+          <a:solidFill xmlns:a="http://schemas.openxmlformats.org/drawingml/2006/main">
+            <a:srgbClr val="2E8C5C"/>
+          </a:solidFill>
+          <a:ln xmlns:a="http://schemas.openxmlformats.org/drawingml/2006/main" w="25400">
+            <a:solidFill>
               <a:srgbClr val="2E8C5C"/>
             </a:solidFill>
             <a:prstDash val="solid"/>
@@ -3729,14 +4082,128 @@
       </p:sp>
       <p:sp>
         <p:nvSpPr>
-          <p:cNvPr id="23" name="dense-read-label"/>
-          <p:cNvSpPr txBox="1"/>
-          <p:nvPr/>
-        </p:nvSpPr>
-        <p:spPr>
-          <a:xfrm xmlns:a="http://schemas.openxmlformats.org/drawingml/2006/main">
-            <a:off x="11315700" y="3543300"/>
-            <a:ext cx="2667000" cy="209550"/>
+          <p:cNvPr id="39" name="timeline-number-4"/>
+          <p:cNvSpPr txBox="1"/>
+          <p:nvPr/>
+        </p:nvSpPr>
+        <p:spPr>
+          <a:xfrm xmlns:a="http://schemas.openxmlformats.org/drawingml/2006/main">
+            <a:off x="11239500" y="4076700"/>
+            <a:ext cx="533400" cy="190500"/>
+          </a:xfrm>
+          <a:prstGeom xmlns:a="http://schemas.openxmlformats.org/drawingml/2006/main" prst="rect">
+            <a:avLst/>
+          </a:prstGeom>
+          <a:noFill xmlns:a="http://schemas.openxmlformats.org/drawingml/2006/main"/>
+          <a:ln xmlns:a="http://schemas.openxmlformats.org/drawingml/2006/main" w="0">
+            <a:noFill/>
+          </a:ln>
+        </p:spPr>
+        <p:txBody>
+          <a:bodyPr xmlns:a="http://schemas.openxmlformats.org/drawingml/2006/main" wrap="square" lIns="0" tIns="0" rIns="0" bIns="0" anchor="t"/>
+          <a:lstStyle xmlns:a="http://schemas.openxmlformats.org/drawingml/2006/main"/>
+          <a:p xmlns:a="http://schemas.openxmlformats.org/drawingml/2006/main">
+            <a:pPr algn="ctr"/>
+            <a:r>
+              <a:rPr lang="en-US" sz="975" b="1">
+                <a:solidFill>
+                  <a:srgbClr val="2E8C5C"/>
+                </a:solidFill>
+                <a:latin typeface="Arial"/>
+                <a:ea typeface="Arial"/>
+              </a:rPr>
+              <a:t>05</a:t>
+            </a:r>
+            <a:endParaRPr lang="en-US"/>
+          </a:p>
+        </p:txBody>
+      </p:sp>
+      <p:sp>
+        <p:nvSpPr>
+          <p:cNvPr id="40" name="timeline-label-4"/>
+          <p:cNvSpPr txBox="1"/>
+          <p:nvPr/>
+        </p:nvSpPr>
+        <p:spPr>
+          <a:xfrm xmlns:a="http://schemas.openxmlformats.org/drawingml/2006/main">
+            <a:off x="10820400" y="5086350"/>
+            <a:ext cx="1371600" cy="228600"/>
+          </a:xfrm>
+          <a:prstGeom xmlns:a="http://schemas.openxmlformats.org/drawingml/2006/main" prst="rect">
+            <a:avLst/>
+          </a:prstGeom>
+          <a:noFill xmlns:a="http://schemas.openxmlformats.org/drawingml/2006/main"/>
+          <a:ln xmlns:a="http://schemas.openxmlformats.org/drawingml/2006/main" w="0">
+            <a:noFill/>
+          </a:ln>
+        </p:spPr>
+        <p:txBody>
+          <a:bodyPr xmlns:a="http://schemas.openxmlformats.org/drawingml/2006/main" wrap="square" lIns="0" tIns="0" rIns="0" bIns="0" anchor="t"/>
+          <a:lstStyle xmlns:a="http://schemas.openxmlformats.org/drawingml/2006/main"/>
+          <a:p xmlns:a="http://schemas.openxmlformats.org/drawingml/2006/main">
+            <a:pPr algn="ctr"/>
+            <a:r>
+              <a:rPr lang="en-US" sz="1350" b="1">
+                <a:solidFill>
+                  <a:srgbClr val="183A2A"/>
+                </a:solidFill>
+                <a:latin typeface="Arial"/>
+                <a:ea typeface="Arial"/>
+              </a:rPr>
+              <a:t>Scale</a:t>
+            </a:r>
+            <a:endParaRPr lang="en-US"/>
+          </a:p>
+        </p:txBody>
+      </p:sp>
+      <p:sp>
+        <p:nvSpPr>
+          <p:cNvPr id="41" name="timeline-text-4"/>
+          <p:cNvSpPr txBox="1"/>
+          <p:nvPr/>
+        </p:nvSpPr>
+        <p:spPr>
+          <a:xfrm xmlns:a="http://schemas.openxmlformats.org/drawingml/2006/main">
+            <a:off x="10610850" y="5391150"/>
+            <a:ext cx="1790700" cy="361950"/>
+          </a:xfrm>
+          <a:prstGeom xmlns:a="http://schemas.openxmlformats.org/drawingml/2006/main" prst="rect">
+            <a:avLst/>
+          </a:prstGeom>
+          <a:noFill xmlns:a="http://schemas.openxmlformats.org/drawingml/2006/main"/>
+          <a:ln xmlns:a="http://schemas.openxmlformats.org/drawingml/2006/main" w="0">
+            <a:noFill/>
+          </a:ln>
+        </p:spPr>
+        <p:txBody>
+          <a:bodyPr xmlns:a="http://schemas.openxmlformats.org/drawingml/2006/main" wrap="square" lIns="0" tIns="0" rIns="0" bIns="0" anchor="t"/>
+          <a:lstStyle xmlns:a="http://schemas.openxmlformats.org/drawingml/2006/main"/>
+          <a:p xmlns:a="http://schemas.openxmlformats.org/drawingml/2006/main">
+            <a:pPr algn="ctr"/>
+            <a:r>
+              <a:rPr lang="en-US" sz="1050">
+                <a:solidFill>
+                  <a:srgbClr val="8B9D94"/>
+                </a:solidFill>
+                <a:latin typeface="Arial"/>
+                <a:ea typeface="Arial"/>
+              </a:rPr>
+              <a:t>Repeat what held</a:t>
+            </a:r>
+            <a:endParaRPr lang="en-US"/>
+          </a:p>
+        </p:txBody>
+      </p:sp>
+      <p:sp>
+        <p:nvSpPr>
+          <p:cNvPr id="42" name="timeline-read-label"/>
+          <p:cNvSpPr txBox="1"/>
+          <p:nvPr/>
+        </p:nvSpPr>
+        <p:spPr>
+          <a:xfrm xmlns:a="http://schemas.openxmlformats.org/drawingml/2006/main">
+            <a:off x="1066800" y="6667500"/>
+            <a:ext cx="2286000" cy="209550"/>
           </a:xfrm>
           <a:prstGeom xmlns:a="http://schemas.openxmlformats.org/drawingml/2006/main" prst="rect">
             <a:avLst/>
@@ -3766,81 +4233,44 @@
       </p:sp>
       <p:sp>
         <p:nvSpPr>
-          <p:cNvPr id="24" name="dense-read-title"/>
-          <p:cNvSpPr txBox="1"/>
-          <p:nvPr/>
-        </p:nvSpPr>
-        <p:spPr>
-          <a:xfrm xmlns:a="http://schemas.openxmlformats.org/drawingml/2006/main">
-            <a:off x="11315700" y="4000500"/>
-            <a:ext cx="2667000" cy="685800"/>
-          </a:xfrm>
-          <a:prstGeom xmlns:a="http://schemas.openxmlformats.org/drawingml/2006/main" prst="rect">
-            <a:avLst/>
-          </a:prstGeom>
-          <a:noFill xmlns:a="http://schemas.openxmlformats.org/drawingml/2006/main"/>
-          <a:ln xmlns:a="http://schemas.openxmlformats.org/drawingml/2006/main" w="0">
-            <a:noFill/>
-          </a:ln>
-        </p:spPr>
-        <p:txBody>
-          <a:bodyPr xmlns:a="http://schemas.openxmlformats.org/drawingml/2006/main" wrap="square" lIns="0" tIns="0" rIns="0" bIns="0" anchor="t"/>
-          <a:lstStyle xmlns:a="http://schemas.openxmlformats.org/drawingml/2006/main"/>
-          <a:p xmlns:a="http://schemas.openxmlformats.org/drawingml/2006/main">
-            <a:r>
-              <a:rPr lang="en-US" sz="1725" b="1">
+          <p:cNvPr id="43" name="timeline-read"/>
+          <p:cNvSpPr txBox="1"/>
+          <p:nvPr/>
+        </p:nvSpPr>
+        <p:spPr>
+          <a:xfrm xmlns:a="http://schemas.openxmlformats.org/drawingml/2006/main">
+            <a:off x="3333750" y="6629400"/>
+            <a:ext cx="8191500" cy="266700"/>
+          </a:xfrm>
+          <a:prstGeom xmlns:a="http://schemas.openxmlformats.org/drawingml/2006/main" prst="rect">
+            <a:avLst/>
+          </a:prstGeom>
+          <a:noFill xmlns:a="http://schemas.openxmlformats.org/drawingml/2006/main"/>
+          <a:ln xmlns:a="http://schemas.openxmlformats.org/drawingml/2006/main" w="0">
+            <a:noFill/>
+          </a:ln>
+        </p:spPr>
+        <p:txBody>
+          <a:bodyPr xmlns:a="http://schemas.openxmlformats.org/drawingml/2006/main" wrap="square" lIns="0" tIns="0" rIns="0" bIns="0" anchor="t"/>
+          <a:lstStyle xmlns:a="http://schemas.openxmlformats.org/drawingml/2006/main"/>
+          <a:p xmlns:a="http://schemas.openxmlformats.org/drawingml/2006/main">
+            <a:r>
+              <a:rPr lang="en-US" sz="1425" b="1">
                 <a:solidFill>
                   <a:srgbClr val="183A2A"/>
                 </a:solidFill>
                 <a:latin typeface="Arial"/>
                 <a:ea typeface="Arial"/>
               </a:rPr>
-              <a:t>The comparison narrows the move.</a:t>
-            </a:r>
-            <a:endParaRPr lang="en-US"/>
-          </a:p>
-        </p:txBody>
-      </p:sp>
-      <p:sp>
-        <p:nvSpPr>
-          <p:cNvPr id="25" name="dense-read-body"/>
-          <p:cNvSpPr txBox="1"/>
-          <p:nvPr/>
-        </p:nvSpPr>
-        <p:spPr>
-          <a:xfrm xmlns:a="http://schemas.openxmlformats.org/drawingml/2006/main">
-            <a:off x="11315700" y="4953000"/>
-            <a:ext cx="2667000" cy="819150"/>
-          </a:xfrm>
-          <a:prstGeom xmlns:a="http://schemas.openxmlformats.org/drawingml/2006/main" prst="rect">
-            <a:avLst/>
-          </a:prstGeom>
-          <a:noFill xmlns:a="http://schemas.openxmlformats.org/drawingml/2006/main"/>
-          <a:ln xmlns:a="http://schemas.openxmlformats.org/drawingml/2006/main" w="0">
-            <a:noFill/>
-          </a:ln>
-        </p:spPr>
-        <p:txBody>
-          <a:bodyPr xmlns:a="http://schemas.openxmlformats.org/drawingml/2006/main" wrap="square" lIns="0" tIns="0" rIns="0" bIns="0" anchor="t"/>
-          <a:lstStyle xmlns:a="http://schemas.openxmlformats.org/drawingml/2006/main"/>
-          <a:p xmlns:a="http://schemas.openxmlformats.org/drawingml/2006/main">
-            <a:r>
-              <a:rPr lang="en-US" sz="1200">
-                <a:solidFill>
-                  <a:srgbClr val="8B9D94"/>
-                </a:solidFill>
-                <a:latin typeface="Arial"/>
-                <a:ea typeface="Arial"/>
-              </a:rPr>
-              <a:t>Locate the constraint; choose the lever.</a:t>
-            </a:r>
-            <a:endParaRPr lang="en-US"/>
-          </a:p>
-        </p:txBody>
-      </p:sp>
-      <p:sp>
-        <p:nvSpPr>
-          <p:cNvPr id="26" name="evidence-band"/>
+              <a:t>A sequence is useful when each handoff changes what can happen next.</a:t>
+            </a:r>
+            <a:endParaRPr lang="en-US"/>
+          </a:p>
+        </p:txBody>
+      </p:sp>
+      <p:sp>
+        <p:nvSpPr>
+          <p:cNvPr id="44" name="evidence-band"/>
           <p:cNvSpPr/>
           <p:nvPr/>
         </p:nvSpPr>
@@ -3876,7 +4306,7 @@
       </p:sp>
       <p:sp>
         <p:nvSpPr>
-          <p:cNvPr id="27" name="evidence-band-text"/>
+          <p:cNvPr id="45" name="evidence-band-text"/>
           <p:cNvSpPr txBox="1"/>
           <p:nvPr/>
         </p:nvSpPr>
@@ -3913,7 +4343,7 @@
       </p:sp>
       <p:sp>
         <p:nvSpPr>
-          <p:cNvPr id="28" name="source"/>
+          <p:cNvPr id="46" name="source"/>
           <p:cNvSpPr txBox="1"/>
           <p:nvPr/>
         </p:nvSpPr>
@@ -3950,7 +4380,7 @@
       </p:sp>
       <p:sp>
         <p:nvSpPr>
-          <p:cNvPr id="29" name="page-number"/>
+          <p:cNvPr id="47" name="page-number"/>
           <p:cNvSpPr txBox="1"/>
           <p:nvPr/>
         </p:nvSpPr>
@@ -4466,7 +4896,7 @@
           <p:nvPr/>
         </p:nvPicPr>
         <p:blipFill>
-          <a:blip xmlns:r="http://schemas.openxmlformats.org/officeDocument/2006/relationships" xmlns:a="http://schemas.openxmlformats.org/drawingml/2006/main" r:embed="rIdOfficeKitImagee4bd683f73b7a543_1"/>
+          <a:blip xmlns:r="http://schemas.openxmlformats.org/officeDocument/2006/relationships" xmlns:a="http://schemas.openxmlformats.org/drawingml/2006/main" r:embed="rIdOfficeKitImage6a3db1fe43260f32_1"/>
           <a:srcRect xmlns:a="http://schemas.openxmlformats.org/drawingml/2006/main" l="0" t="47256" r="0" b="47256"/>
           <a:stretch xmlns:a="http://schemas.openxmlformats.org/drawingml/2006/main">
             <a:fillRect/>
@@ -5593,7 +6023,7 @@
     <p:bg>
       <p:bgPr>
         <a:blipFill xmlns:a="http://schemas.openxmlformats.org/drawingml/2006/main">
-          <a:blip xmlns:r="http://schemas.openxmlformats.org/officeDocument/2006/relationships" r:embed="rIdOfficeKitImage9df32179333a9f35_1"/>
+          <a:blip xmlns:r="http://schemas.openxmlformats.org/officeDocument/2006/relationships" r:embed="rIdOfficeKitImagea5c00489db854fa2_1"/>
           <a:stretch>
             <a:fillRect/>
           </a:stretch>
@@ -6832,7 +7262,7 @@
           <p:nvPr/>
         </p:nvPicPr>
         <p:blipFill>
-          <a:blip xmlns:r="http://schemas.openxmlformats.org/officeDocument/2006/relationships" xmlns:a="http://schemas.openxmlformats.org/drawingml/2006/main" r:embed="rIdOfficeKitImage4786b3004943cd8a_1"/>
+          <a:blip xmlns:r="http://schemas.openxmlformats.org/officeDocument/2006/relationships" xmlns:a="http://schemas.openxmlformats.org/drawingml/2006/main" r:embed="rIdOfficeKitImage89634c5b24a89a02_1"/>
           <a:srcRect xmlns:a="http://schemas.openxmlformats.org/drawingml/2006/main" l="0" t="47256" r="0" b="47256"/>
           <a:stretch xmlns:a="http://schemas.openxmlformats.org/drawingml/2006/main">
             <a:fillRect/>

--- a/skills/presentation-template-library/skills/artifact-template-forest-strategy/assets/reference.pptx
+++ b/skills/presentation-template-library/skills/artifact-template-forest-strategy/assets/reference.pptx
@@ -200,7 +200,7 @@
     <p:bg>
       <p:bgPr>
         <a:blipFill xmlns:a="http://schemas.openxmlformats.org/drawingml/2006/main">
-          <a:blip xmlns:r="http://schemas.openxmlformats.org/officeDocument/2006/relationships" r:embed="rIdOfficeKitImage0d3bd4b5ccdd7cbb_1"/>
+          <a:blip xmlns:r="http://schemas.openxmlformats.org/officeDocument/2006/relationships" r:embed="rIdOfficeKitImageb4650c5e003a270c_1"/>
           <a:stretch>
             <a:fillRect/>
           </a:stretch>
@@ -1613,8 +1613,8 @@
           <p:nvPr/>
         </p:nvPicPr>
         <p:blipFill>
-          <a:blip xmlns:r="http://schemas.openxmlformats.org/officeDocument/2006/relationships" xmlns:a="http://schemas.openxmlformats.org/drawingml/2006/main" r:embed="rIdOfficeKitImage99c9affacaac8e72_1"/>
-          <a:srcRect xmlns:a="http://schemas.openxmlformats.org/drawingml/2006/main" l="0" t="47256" r="0" b="47256"/>
+          <a:blip xmlns:r="http://schemas.openxmlformats.org/officeDocument/2006/relationships" xmlns:a="http://schemas.openxmlformats.org/drawingml/2006/main" r:embed="rIdOfficeKitImage0d3bd4b5ccdd7cbb_1"/>
+          <a:srcRect xmlns:a="http://schemas.openxmlformats.org/drawingml/2006/main" l="0" t="47258" r="0" b="47258"/>
           <a:stretch xmlns:a="http://schemas.openxmlformats.org/drawingml/2006/main">
             <a:fillRect/>
           </a:stretch>
@@ -3174,7 +3174,7 @@
           <p:nvPr/>
         </p:nvPicPr>
         <p:blipFill>
-          <a:blip xmlns:r="http://schemas.openxmlformats.org/officeDocument/2006/relationships" xmlns:a="http://schemas.openxmlformats.org/drawingml/2006/main" r:embed="rIdOfficeKitImage10e4539a68783891_1"/>
+          <a:blip xmlns:r="http://schemas.openxmlformats.org/officeDocument/2006/relationships" xmlns:a="http://schemas.openxmlformats.org/drawingml/2006/main" r:embed="rIdOfficeKitImageff039bf2f181c5d1_1"/>
           <a:srcRect xmlns:a="http://schemas.openxmlformats.org/drawingml/2006/main" l="0" t="47258" r="0" b="47258"/>
           <a:stretch xmlns:a="http://schemas.openxmlformats.org/drawingml/2006/main">
             <a:fillRect/>
@@ -4896,7 +4896,7 @@
           <p:nvPr/>
         </p:nvPicPr>
         <p:blipFill>
-          <a:blip xmlns:r="http://schemas.openxmlformats.org/officeDocument/2006/relationships" xmlns:a="http://schemas.openxmlformats.org/drawingml/2006/main" r:embed="rIdOfficeKitImage6a3db1fe43260f32_1"/>
+          <a:blip xmlns:r="http://schemas.openxmlformats.org/officeDocument/2006/relationships" xmlns:a="http://schemas.openxmlformats.org/drawingml/2006/main" r:embed="rIdOfficeKitImage99c9affacaac8e72_1"/>
           <a:srcRect xmlns:a="http://schemas.openxmlformats.org/drawingml/2006/main" l="0" t="47256" r="0" b="47256"/>
           <a:stretch xmlns:a="http://schemas.openxmlformats.org/drawingml/2006/main">
             <a:fillRect/>
@@ -6023,7 +6023,7 @@
     <p:bg>
       <p:bgPr>
         <a:blipFill xmlns:a="http://schemas.openxmlformats.org/drawingml/2006/main">
-          <a:blip xmlns:r="http://schemas.openxmlformats.org/officeDocument/2006/relationships" r:embed="rIdOfficeKitImagea5c00489db854fa2_1"/>
+          <a:blip xmlns:r="http://schemas.openxmlformats.org/officeDocument/2006/relationships" r:embed="rIdOfficeKitImage10e4539a68783891_1"/>
           <a:stretch>
             <a:fillRect/>
           </a:stretch>
@@ -7262,7 +7262,7 @@
           <p:nvPr/>
         </p:nvPicPr>
         <p:blipFill>
-          <a:blip xmlns:r="http://schemas.openxmlformats.org/officeDocument/2006/relationships" xmlns:a="http://schemas.openxmlformats.org/drawingml/2006/main" r:embed="rIdOfficeKitImage89634c5b24a89a02_1"/>
+          <a:blip xmlns:r="http://schemas.openxmlformats.org/officeDocument/2006/relationships" xmlns:a="http://schemas.openxmlformats.org/drawingml/2006/main" r:embed="rIdOfficeKitImage6a3db1fe43260f32_1"/>
           <a:srcRect xmlns:a="http://schemas.openxmlformats.org/drawingml/2006/main" l="0" t="47256" r="0" b="47256"/>
           <a:stretch xmlns:a="http://schemas.openxmlformats.org/drawingml/2006/main">
             <a:fillRect/>
